--- a/lectures/Lecture 8.1 - Docker.pptx
+++ b/lectures/Lecture 8.1 - Docker.pptx
@@ -1025,15 +1025,15 @@
             </a:pPr>
             <a:r>
               <a:rPr lang="en-US" dirty="0"/>
-              <a:t>The reveal is meant to land as a small surprise - they have been using containers for weeks without the word. </a:t>
+              <a:t>Small surprise here, and it should land as one: they've been using containers for weeks and just didn't have the word for it. nixpacks poked at their repo, guessed a Python version, installed a bunch of stuff, and what came out the other end was a container image. Which is a nice way in, because now Docker stops being some new world they have to go learn and turns into the same thing they've been doing all along with the lid off. The PaaS trade is smart defaults in exchange for not getting to choose, and today is really about the cases where you want to choose.</a:t>
             </a:r>
             <a:r>
               <a:rPr lang="en-US" dirty="0" err="1"/>
-              <a:t>nixpacks</a:t>
+              <a:t/>
             </a:r>
             <a:r>
               <a:rPr lang="en-US" dirty="0"/>
-              <a:t> looked at their files, guessed a Python version, installed things, and the output of all that guessing was a container image. That's a nice way in, because it means Docker isn't a new world, it's the same world with the lid off. The PaaS deal is smart defaults in exchange for not choosing - today is about when you want to choose.</a:t>
+              <a:t/>
             </a:r>
             <a:endParaRPr dirty="0"/>
           </a:p>
@@ -1191,7 +1191,7 @@
             </a:pPr>
             <a:r>
               <a:rPr lang="en-US" dirty="0"/>
-              <a:t>Python version, the OS itself, installed system libraries, C libraries the wheels link against, environment variables, file paths, locale, CPU architecture (arm vs x86), what's on PATH, a different version of the same pip package. Write every answer up. The payoff line, once the board is full: a container freezes ALL of these into the image, so the entire list stops mattering. That sets up the design question slide - students will have just generated the problem in their own words, so the solution lands as theirs.</a:t>
+              <a:t>Python version, the OS itself, installed system libraries, C libraries the wheels link against, environment variables, file paths, locale, CPU architecture (arm vs x86), what's on PATH, a different version of the same pip package. Write every answer up on the board. Then once it's full: a container freezes ALL of this into the image, so the whole list stops mattering at once. Which sets up the design question nicely, because they'll have just written the problem out in their own words and the answer lands as theirs instead of mine.</a:t>
             </a:r>
             <a:endParaRPr dirty="0"/>
           </a:p>
@@ -1349,7 +1349,7 @@
             </a:pPr>
             <a:r>
               <a:rPr lang="en-US" dirty="0"/>
-              <a:t>The classic 'works on my machine' dance, and it really is a rite of passage - anyone who's deployed something non-trivial has felt a version of it. Make the pain concrete before naming the solution. The key conceptual move is splitting 'your code' from 'your dependencies' - students tend to think of their app as one thing, and the whole Docker story only makes sense once those are two things in their head.</a:t>
+              <a:t>The classic 'works on my machine' dance, and it really is a rite of passage - anyone who's deployed something non-trivial has felt a version of it. Make the pain concrete before naming any solution. The move to get them to make here is splitting 'your code' from 'your dependencies,' because students think of their app as one thing and none of the Docker story lands until those are two separate things in their head.</a:t>
             </a:r>
             <a:endParaRPr dirty="0"/>
           </a:p>
@@ -1525,15 +1525,15 @@
             </a:pPr>
             <a:r>
               <a:rPr lang="en-US" dirty="0"/>
-              <a:t>Step back and let students feel the design space before naming the winner. Every alternative on the list is something people actually tried, and each has a real failure mode - READMEs rot, VMs are slow and heavy, and making two machines bit-identical by hand is basically impossible. Docker won because it solves the problem at </a:t>
+              <a:t>Step back and let them feel the design space before naming a winner. Everything on that list is something people actually tried, and each one has a real failure mode - READMEs rot, VMs are slow and heavy, and getting two machines bit-identical by hand is basically impossible. Docker won because it lands at kinda the right level, way lighter than a VM and a whole lot more reliable than hoping.</a:t>
             </a:r>
             <a:r>
               <a:rPr lang="en-US" dirty="0" err="1"/>
-              <a:t>kinda</a:t>
+              <a:t/>
             </a:r>
             <a:r>
               <a:rPr lang="en-US" dirty="0"/>
-              <a:t> the right level: lighter than a VM, far more reliable than hope.</a:t>
+              <a:t/>
             </a:r>
             <a:endParaRPr dirty="0"/>
           </a:p>
@@ -1702,15 +1702,15 @@
             </a:pPr>
             <a:r>
               <a:rPr lang="en-US" dirty="0"/>
-              <a:t>Step back and let students feel the design space before naming the winner. Every alternative on the list is something people actually tried, and each has a real failure mode - READMEs rot, VMs are slow and heavy, and making two machines bit-identical by hand is basically impossible. Docker won because it solves the problem at </a:t>
+              <a:t>Step back and let them feel the design space before naming a winner. Everything on that list is something people actually tried, and each one has a real failure mode - READMEs rot, VMs are slow and heavy, and getting two machines bit-identical by hand is basically impossible. Docker won because it lands at kinda the right level, way lighter than a VM and a whole lot more reliable than hoping.</a:t>
             </a:r>
             <a:r>
               <a:rPr lang="en-US" dirty="0" err="1"/>
-              <a:t>kinda</a:t>
+              <a:t/>
             </a:r>
             <a:r>
               <a:rPr lang="en-US" dirty="0"/>
-              <a:t> the right level: lighter than a VM, far more reliable than hope.</a:t>
+              <a:t/>
             </a:r>
             <a:endParaRPr dirty="0"/>
           </a:p>
@@ -1868,7 +1868,7 @@
             </a:pPr>
             <a:r>
               <a:rPr lang="en-US" dirty="0"/>
-              <a:t>The mental model. Image vs container is the key distinction, and a lot of later confusion traces back to conflating them. The new 'prove it' slide makes the central claim physical instead of asserted.</a:t>
+              <a:t>Image vs container is the distinction that matters, and a lot of the confusion later in the lecture traces back to students quietly conflating the two. The 'prove it' slide next makes the claim physical instead of me just asserting it.</a:t>
             </a:r>
             <a:endParaRPr dirty="0"/>
           </a:p>
@@ -2026,7 +2026,7 @@
             </a:pPr>
             <a:r>
               <a:rPr lang="en-US" dirty="0"/>
-              <a:t>The single thing students should walk out with is that a container is a PROCESS, not a VM. It's the host kernel playing tricks on the process so the process thinks it's alone on a fresh machine...and because there is no separate kernel being booted, startup is in milliseconds instead of the minute-plus you'd see with a VM. That speed difference is why containers took over and VMs didn't. The next slide proves the 'it's just a process' claim instead of asking them to take it on faith.</a:t>
+              <a:t>If they remember one thing from today, it's that a container is a PROCESS. The host kernel is lying to it convincingly enough that the process thinks it's alone on a fresh machine, and since there's no second kernel getting booted anywhere, startup is milliseconds instead of the minute-plus you'd sit through on a VM...which is most of why containers took over. Next slide proves it instead of asking them to take my word for it.</a:t>
             </a:r>
             <a:endParaRPr dirty="0"/>
           </a:p>
@@ -2184,23 +2184,23 @@
             </a:pPr>
             <a:r>
               <a:rPr lang="en-US" dirty="0"/>
-              <a:t>The point of this slide is to make the central claim physical. Two demos, and if you can run them live, do. First: start the container detached, then </a:t>
+              <a:t>Make the claim physical here. Two demos, both worth running live if the projector cooperates - start the container detached, then ps on the host, and there's the container's uvicorn sitting right in your own process list, because that is all it ever was. Then docker run -it ... bash drops you into what looks like a brand-new Linux box, its own filesystem, its own root user, and you exit and there's nothing left behind. This is usually where 'the cloud is just processes' clicks for people.</a:t>
             </a:r>
             <a:r>
               <a:rPr lang="en-US" dirty="0" err="1"/>
-              <a:t>ps</a:t>
+              <a:t/>
             </a:r>
             <a:r>
               <a:rPr lang="en-US" dirty="0"/>
-              <a:t> on the host - the container's </a:t>
+              <a:t/>
             </a:r>
             <a:r>
               <a:rPr lang="en-US" dirty="0" err="1"/>
-              <a:t>uvicorn</a:t>
+              <a:t/>
             </a:r>
             <a:r>
               <a:rPr lang="en-US" dirty="0"/>
-              <a:t> process is sitting right there in your own process list, because that is literally what it is. Not a VM, a process. Second: docker run -it ... bash drops you into a shell that looks like a brand-new Linux box, its own filesystem, its own root user, and then you exit and it leaves no trace. This is the slide where 'the cloud is just processes' clicks.</a:t>
+              <a:t/>
             </a:r>
             <a:endParaRPr dirty="0"/>
           </a:p>
@@ -2358,23 +2358,23 @@
             </a:pPr>
             <a:r>
               <a:rPr lang="en-US" dirty="0"/>
-              <a:t>The point of this slide is to make the central claim physical. Two demos, and if you can run them live, do. First: start the container detached, then </a:t>
+              <a:t>Make the claim physical here. Two demos, both worth running live if the projector cooperates - start the container detached, then ps on the host, and there's the container's uvicorn sitting right in your own process list, because that is all it ever was. Then docker run -it ... bash drops you into what looks like a brand-new Linux box, its own filesystem, its own root user, and you exit and there's nothing left behind. This is usually where 'the cloud is just processes' clicks for people.</a:t>
             </a:r>
             <a:r>
               <a:rPr lang="en-US" dirty="0" err="1"/>
-              <a:t>ps</a:t>
+              <a:t/>
             </a:r>
             <a:r>
               <a:rPr lang="en-US" dirty="0"/>
-              <a:t> on the host - the container's </a:t>
+              <a:t/>
             </a:r>
             <a:r>
               <a:rPr lang="en-US" dirty="0" err="1"/>
-              <a:t>uvicorn</a:t>
+              <a:t/>
             </a:r>
             <a:r>
               <a:rPr lang="en-US" dirty="0"/>
-              <a:t> process is sitting right there in your own process list, because that is literally what it is. Not a VM, a process. Second: docker run -it ... bash drops you into a shell that looks like a brand-new Linux box, its own filesystem, its own root user, and then you exit and it leaves no trace. This is the slide where 'the cloud is just processes' clicks.</a:t>
+              <a:t/>
             </a:r>
             <a:endParaRPr dirty="0"/>
           </a:p>
@@ -2532,23 +2532,23 @@
             </a:pPr>
             <a:r>
               <a:rPr lang="en-US" dirty="0"/>
-              <a:t>The point of this slide is to make the central claim physical. Two demos, and if you can run them live, do. First: start the container detached, then </a:t>
+              <a:t>Make the claim physical here. Two demos, both worth running live if the projector cooperates - start the container detached, then ps on the host, and there's the container's uvicorn sitting right in your own process list, because that is all it ever was. Then docker run -it ... bash drops you into what looks like a brand-new Linux box, its own filesystem, its own root user, and you exit and there's nothing left behind. This is usually where 'the cloud is just processes' clicks for people.</a:t>
             </a:r>
             <a:r>
               <a:rPr lang="en-US" dirty="0" err="1"/>
-              <a:t>ps</a:t>
+              <a:t/>
             </a:r>
             <a:r>
               <a:rPr lang="en-US" dirty="0"/>
-              <a:t> on the host - the container's </a:t>
+              <a:t/>
             </a:r>
             <a:r>
               <a:rPr lang="en-US" dirty="0" err="1"/>
-              <a:t>uvicorn</a:t>
+              <a:t/>
             </a:r>
             <a:r>
               <a:rPr lang="en-US" dirty="0"/>
-              <a:t> process is sitting right there in your own process list, because that is literally what it is. Not a VM, a process. Second: docker run -it ... bash drops you into a shell that looks like a brand-new Linux box, its own filesystem, its own root user, and then you exit and it leaves no trace. This is the slide where 'the cloud is just processes' clicks.</a:t>
+              <a:t/>
             </a:r>
             <a:endParaRPr dirty="0"/>
           </a:p>
@@ -2706,15 +2706,15 @@
             </a:pPr>
             <a:r>
               <a:rPr lang="en-US" dirty="0"/>
-              <a:t>Define your API routes first so they match before the static mount, then mount the built frontend at /. The html=True flag makes it return </a:t>
+              <a:t>Routes first, static mount second, or the mount swallows your API paths. And html=True is the bit that makes it hand back index.html for any path that isn't a real file on disk, which is what client-side routing needs to work at all.</a:t>
             </a:r>
             <a:r>
               <a:rPr lang="en-US" dirty="0" err="1"/>
-              <a:t>index.html</a:t>
+              <a:t/>
             </a:r>
             <a:r>
               <a:rPr lang="en-US" dirty="0"/>
-              <a:t> for paths that don't match an actual file on disk, which is what you need for client-side routing to work.</a:t>
+              <a:t/>
             </a:r>
             <a:endParaRPr dirty="0"/>
           </a:p>
@@ -2872,7 +2872,7 @@
             </a:pPr>
             <a:r>
               <a:rPr lang="en-US" dirty="0"/>
-              <a:t>The class-vs-instance analogy really does land for anyone who's done OOP, which is all of them. Drive home that you don't run an image, you build one and then you run containers FROM it...the wording matters because the CLI commands on the next slides use exactly those verbs and anyone who's conflated the two will get lost fast.</a:t>
+              <a:t>The class-vs-instance analogy lands for anyone who's done OOP, which is all of them. Drive home the verbs - you build an image, and then you run containers FROM it...that wording matters because the CLI commands coming up use exactly those words, and anyone who's mushed the two together is gonna get lost fast.</a:t>
             </a:r>
             <a:endParaRPr dirty="0"/>
           </a:p>
@@ -3030,7 +3030,7 @@
             </a:pPr>
             <a:r>
               <a:rPr lang="en-US" dirty="0"/>
-              <a:t>The class-vs-instance analogy really does land for anyone who's done OOP, which is all of them. Drive home that you don't run an image, you build one and then you run containers FROM it...the wording matters because the CLI commands on the next slides use exactly those verbs and anyone who's conflated the two will get lost fast.</a:t>
+              <a:t>The class-vs-instance analogy lands for anyone who's done OOP, which is all of them. Drive home the verbs - you build an image, and then you run containers FROM it...that wording matters because the CLI commands coming up use exactly those words, and anyone who's mushed the two together is gonna get lost fast.</a:t>
             </a:r>
             <a:endParaRPr dirty="0"/>
           </a:p>
@@ -3196,7 +3196,7 @@
             </a:r>
             <a:r>
               <a:rPr lang="en-US" dirty="0"/>
-              <a:t> works. You basically never start from scratch, you start from something like python:3.12-slim that the Python team keeps patched and secure, and you just add what your specific app needs. A registry is just a place images live, the way GitHub is a place repos live.</a:t>
+              <a:t> works. You basically never start from scratch - you start from something like python:3.12-slim that the Python team keeps patched, and then add whatever your app specifically needs on top. And a registry is just a place images live, same as GitHub is a place repos live.</a:t>
             </a:r>
             <a:endParaRPr dirty="0"/>
           </a:p>
@@ -3568,23 +3568,23 @@
             </a:pPr>
             <a:r>
               <a:rPr lang="en-US" dirty="0"/>
-              <a:t>Five instructions really do cover almost every </a:t>
+              <a:t>Five instructions really do cover almost every Dockerfile you'll write for a long while. FROM is the base, WORKDIR is where the rest of the commands run from, COPY brings your code in, RUN is stuff that happens at build time, and CMD is what actually runs when the container starts...learn those five and you can read the overwhelming majority of Dockerfiles in the wild. The rest is edge cases.</a:t>
             </a:r>
             <a:r>
               <a:rPr lang="en-US" dirty="0" err="1"/>
-              <a:t>Dockerfile</a:t>
+              <a:t/>
             </a:r>
             <a:r>
               <a:rPr lang="en-US" dirty="0"/>
-              <a:t> you'll write for a long time. FROM is the base, WORKDIR sets the directory, COPY brings your code in, RUN installs stuff at build time, CMD says what to run when the container starts...learn these five and you can read and write the overwhelming majority of </a:t>
+              <a:t/>
             </a:r>
             <a:r>
               <a:rPr lang="en-US" dirty="0" err="1"/>
-              <a:t>Dockerfiles</a:t>
+              <a:t/>
             </a:r>
             <a:r>
               <a:rPr lang="en-US" dirty="0"/>
-              <a:t> in the wild. The other instructions are mostly for edge cases.</a:t>
+              <a:t/>
             </a:r>
             <a:endParaRPr dirty="0"/>
           </a:p>
@@ -3742,7 +3742,7 @@
             </a:pPr>
             <a:r>
               <a:rPr lang="en-US" dirty="0"/>
-              <a:t>Walk through line by line. FROM pulls a minimal Python 3.12 base. WORKDIR creates /app inside the image so the rest of the commands run from there. COPY requirements then RUN pip install is the installs-deps dance...and THEN we COPY the rest of the code. That order isn't cosmetic, it's really the caching story on the next few slides. CMD is the default command when someone runs the container.</a:t>
+              <a:t>Walk it line by line. FROM pulls a minimal Python 3.12 base, WORKDIR makes /app inside the image so everything after it runs from there, then COPY requirements and RUN pip install is the installs-deps dance...and THEN we COPY the rest of the code. That ordering is doing real work, and it's the whole caching story on the next few slides. CMD is just the default command when someone runs the container.</a:t>
             </a:r>
             <a:endParaRPr dirty="0"/>
           </a:p>
@@ -3900,7 +3900,7 @@
             </a:pPr>
             <a:r>
               <a:rPr lang="en-US" dirty="0"/>
-              <a:t>Walk through line by line. FROM pulls a minimal Python 3.12 base. WORKDIR creates /app inside the image so the rest of the commands run from there. COPY requirements then RUN pip install is the installs-deps dance...and THEN we COPY the rest of the code. That order isn't cosmetic, it's really the caching story on the next few slides. CMD is the default command when someone runs the container.</a:t>
+              <a:t>Walk it line by line. FROM pulls a minimal Python 3.12 base, WORKDIR makes /app inside the image so everything after it runs from there, then COPY requirements and RUN pip install is the installs-deps dance...and THEN we COPY the rest of the code. That ordering is doing real work, and it's the whole caching story on the next few slides. CMD is just the default command when someone runs the container.</a:t>
             </a:r>
             <a:endParaRPr dirty="0"/>
           </a:p>
@@ -4058,7 +4058,7 @@
             </a:pPr>
             <a:r>
               <a:rPr lang="en-US" dirty="0"/>
-              <a:t>Walk through line by line. FROM pulls a minimal Python 3.12 base. WORKDIR creates /app inside the image so the rest of the commands run from there. COPY requirements then RUN pip install is the installs-deps dance...and THEN we COPY the rest of the code. That order isn't cosmetic, it's really the caching story on the next few slides. CMD is the default command when someone runs the container.</a:t>
+              <a:t>Walk it line by line. FROM pulls a minimal Python 3.12 base, WORKDIR makes /app inside the image so everything after it runs from there, then COPY requirements and RUN pip install is the installs-deps dance...and THEN we COPY the rest of the code. That ordering is doing real work, and it's the whole caching story on the next few slides. CMD is just the default command when someone runs the container.</a:t>
             </a:r>
             <a:endParaRPr dirty="0"/>
           </a:p>
@@ -4216,7 +4216,7 @@
             </a:pPr>
             <a:r>
               <a:rPr lang="en-US" dirty="0"/>
-              <a:t>Walk through line by line. FROM pulls a minimal Python 3.12 base. WORKDIR creates /app inside the image so the rest of the commands run from there. COPY requirements then RUN pip install is the installs-deps dance...and THEN we COPY the rest of the code. That order isn't cosmetic, it's really the caching story on the next few slides. CMD is the default command when someone runs the container.</a:t>
+              <a:t>Walk it line by line. FROM pulls a minimal Python 3.12 base, WORKDIR makes /app inside the image so everything after it runs from there, then COPY requirements and RUN pip install is the installs-deps dance...and THEN we COPY the rest of the code. That ordering is doing real work, and it's the whole caching story on the next few slides. CMD is just the default command when someone runs the container.</a:t>
             </a:r>
             <a:endParaRPr dirty="0"/>
           </a:p>
@@ -4374,7 +4374,7 @@
             </a:pPr>
             <a:r>
               <a:rPr lang="en-US" dirty="0"/>
-              <a:t>Walk through line by line. FROM pulls a minimal Python 3.12 base. WORKDIR creates /app inside the image so the rest of the commands run from there. COPY requirements then RUN pip install is the installs-deps dance...and THEN we COPY the rest of the code. That order isn't cosmetic, it's really the caching story on the next few slides. CMD is the default command when someone runs the container.</a:t>
+              <a:t>Walk it line by line. FROM pulls a minimal Python 3.12 base, WORKDIR makes /app inside the image so everything after it runs from there, then COPY requirements and RUN pip install is the installs-deps dance...and THEN we COPY the rest of the code. That ordering is doing real work, and it's the whole caching story on the next few slides. CMD is just the default command when someone runs the container.</a:t>
             </a:r>
             <a:endParaRPr dirty="0"/>
           </a:p>
@@ -4532,15 +4532,15 @@
             </a:pPr>
             <a:r>
               <a:rPr lang="en-US" dirty="0"/>
-              <a:t>Define your API routes first so they match before the static mount, then mount the built frontend at /. The html=True flag makes it return </a:t>
+              <a:t>Routes first, static mount second, or the mount swallows your API paths. And html=True is the bit that makes it hand back index.html for any path that isn't a real file on disk, which is what client-side routing needs to work at all.</a:t>
             </a:r>
             <a:r>
               <a:rPr lang="en-US" dirty="0" err="1"/>
-              <a:t>index.html</a:t>
+              <a:t/>
             </a:r>
             <a:r>
               <a:rPr lang="en-US" dirty="0"/>
-              <a:t> for paths that don't match an actual file on disk, which is what you need for client-side routing to work.</a:t>
+              <a:t/>
             </a:r>
             <a:endParaRPr dirty="0"/>
           </a:p>
@@ -4698,23 +4698,23 @@
             </a:pPr>
             <a:r>
               <a:rPr lang="en-US" dirty="0"/>
-              <a:t>Layer caching is THE reason </a:t>
+              <a:t>Layer caching is THE reason Dockerfile order matters. A Dockerfile that copies code before installing deps reinstalls every dependency on every code change, which is fine the first time and super annoying by the twentieth build that day...and once you've felt the difference between a 2-second rebuild and a 30-second one, slow-stuff-first sticks without me having to sell it. Predict beat next slide, so don't pre-spoil it.</a:t>
             </a:r>
             <a:r>
               <a:rPr lang="en-US" dirty="0" err="1"/>
-              <a:t>Dockerfile</a:t>
+              <a:t/>
             </a:r>
             <a:r>
               <a:rPr lang="en-US" dirty="0"/>
-              <a:t> order matters. A </a:t>
+              <a:t/>
             </a:r>
             <a:r>
               <a:rPr lang="en-US" dirty="0" err="1"/>
-              <a:t>Dockerfile</a:t>
+              <a:t/>
             </a:r>
             <a:r>
               <a:rPr lang="en-US" dirty="0"/>
-              <a:t> that copies code before installing deps reinstalls every dependency on every code change...which is fine once, super annoying by the twentieth build that day. Once you feel the difference between a 2-second rebuild and a 30-second one, the slow-first-fast-last rule sticks instantly. The next slide is a predict beat on exactly this - don't pre-spoil it.</a:t>
+              <a:t/>
             </a:r>
             <a:endParaRPr dirty="0"/>
           </a:p>
@@ -4872,15 +4872,15 @@
             </a:pPr>
             <a:r>
               <a:rPr lang="en-US" dirty="0"/>
-              <a:t>Call-on-someone, don't reveal. Show of hands per option. The answer is (c). Docker caches layers in order, and the FIRST layer whose inputs changed - here [5], the COPY . . that picks up </a:t>
+              <a:t>Call on someone, don't reveal. Show of hands per option. It's (c). Docker caches layers in order, so the FIRST layer whose inputs changed - here that's [5], the COPY . . that picks up app.py - gets rebuilt, and everything below it goes with it, because each layer sits on top of the one before. [1] through [4] never got touched, so pip install does NOT run again. (a) is 'make clean' thinking. (d) is the trap for anyone half-remembering the rule, right idea aimed at the wrong layers. Then the bad-vs-good ordering slide is what this behavior forces on you.</a:t>
             </a:r>
             <a:r>
               <a:rPr lang="en-US" dirty="0" err="1"/>
-              <a:t>app.py</a:t>
+              <a:t/>
             </a:r>
             <a:r>
               <a:rPr lang="en-US" dirty="0"/>
-              <a:t> - gets rebuilt, along with everything below it, because each layer is built on top of the one before. [1] through [4] are untouched, so pip install does NOT run again. (a) is 'make clean' thinking. (d) is the trap for anyone half-remembering the rule - it's the right idea pointed at the wrong layers. The next slide is the bad-vs-good ordering this caching behavior forces on you.</a:t>
+              <a:t/>
             </a:r>
             <a:endParaRPr dirty="0"/>
           </a:p>
@@ -5038,15 +5038,15 @@
             </a:pPr>
             <a:r>
               <a:rPr lang="en-US" dirty="0"/>
-              <a:t>Call-on-someone, don't reveal. Show of hands per option. The answer is (c). Docker caches layers in order, and the FIRST layer whose inputs changed - here [5], the COPY . . that picks up </a:t>
+              <a:t>Call on someone, don't reveal. Show of hands per option. It's (c). Docker caches layers in order, so the FIRST layer whose inputs changed - here that's [5], the COPY . . that picks up app.py - gets rebuilt, and everything below it goes with it, because each layer sits on top of the one before. [1] through [4] never got touched, so pip install does NOT run again. (a) is 'make clean' thinking. (d) is the trap for anyone half-remembering the rule, right idea aimed at the wrong layers. Then the bad-vs-good ordering slide is what this behavior forces on you.</a:t>
             </a:r>
             <a:r>
               <a:rPr lang="en-US" dirty="0" err="1"/>
-              <a:t>app.py</a:t>
+              <a:t/>
             </a:r>
             <a:r>
               <a:rPr lang="en-US" dirty="0"/>
-              <a:t> - gets rebuilt, along with everything below it, because each layer is built on top of the one before. [1] through [4] are untouched, so pip install does NOT run again. (a) is 'make clean' thinking. (d) is the trap for anyone half-remembering the rule - it's the right idea pointed at the wrong layers. The next slide is the bad-vs-good ordering this caching behavior forces on you.</a:t>
+              <a:t/>
             </a:r>
             <a:endParaRPr dirty="0"/>
           </a:p>
@@ -5220,15 +5220,15 @@
             </a:r>
             <a:r>
               <a:rPr lang="en-US" dirty="0"/>
-              <a:t> sits. In the bad version any code change busts the pip install cache too, because COPY . . ran before the install. In the good version the install layer stays cached until </a:t>
+              <a:t> sits. In the bad version any code change busts the pip install cache too, because COPY . . ran before the install. In the good version the install layer stays cached until requirements.txt itself changes, which is maybe once a week, and that's where the 15x on a busy day comes from.</a:t>
             </a:r>
             <a:r>
               <a:rPr lang="en-US" dirty="0" err="1"/>
-              <a:t>requirements.txt</a:t>
+              <a:t/>
             </a:r>
             <a:r>
               <a:rPr lang="en-US" dirty="0"/>
-              <a:t> itself changes...which is maybe once a week. That's the 15x rebuild speedup on a busy day.</a:t>
+              <a:t/>
             </a:r>
             <a:endParaRPr dirty="0"/>
           </a:p>
@@ -5402,15 +5402,15 @@
             </a:r>
             <a:r>
               <a:rPr lang="en-US" dirty="0"/>
-              <a:t> sits. In the bad version any code change busts the pip install cache too, because COPY . . ran before the install. In the good version the install layer stays cached until </a:t>
+              <a:t> sits. In the bad version any code change busts the pip install cache too, because COPY . . ran before the install. In the good version the install layer stays cached until requirements.txt itself changes, which is maybe once a week, and that's where the 15x on a busy day comes from.</a:t>
             </a:r>
             <a:r>
               <a:rPr lang="en-US" dirty="0" err="1"/>
-              <a:t>requirements.txt</a:t>
+              <a:t/>
             </a:r>
             <a:r>
               <a:rPr lang="en-US" dirty="0"/>
-              <a:t> itself changes...which is maybe once a week. That's the 15x rebuild speedup on a busy day.</a:t>
+              <a:t/>
             </a:r>
             <a:endParaRPr dirty="0"/>
           </a:p>
@@ -5568,15 +5568,15 @@
             </a:pPr>
             <a:r>
               <a:rPr lang="en-US" dirty="0"/>
-              <a:t>The mechanics of actually using a </a:t>
+              <a:t>Mechanics of actually using the thing. Spot-the-bug beat lives here, and it's the gotcha that costs people the most time by a mile.</a:t>
             </a:r>
             <a:r>
               <a:rPr lang="en-US" dirty="0" err="1"/>
-              <a:t>Dockerfile</a:t>
+              <a:t/>
             </a:r>
             <a:r>
               <a:rPr lang="en-US" dirty="0"/>
-              <a:t>. The spot-the-bug beat lives here - it's the one Docker gotcha that costs people the most time.</a:t>
+              <a:t/>
             </a:r>
             <a:endParaRPr dirty="0"/>
           </a:p>
@@ -5734,15 +5734,15 @@
             </a:pPr>
             <a:r>
               <a:rPr lang="en-US" dirty="0"/>
-              <a:t>Walk through the output. Each numbered step matches one of the </a:t>
+              <a:t>Walk the output. Each numbered step lines up with one of the Dockerfile instructions from earlier, which is a nice sanity check, and notice [1] through [4] showing 0.0s on a rebuild - that's the layer caching from the predict slide doing its job. The -t flag names the image so you can refer to it later, and the dot at the end is the build context, meaning the directory Docker is allowed to COPY from.</a:t>
             </a:r>
             <a:r>
               <a:rPr lang="en-US" dirty="0" err="1"/>
-              <a:t>Dockerfile</a:t>
+              <a:t/>
             </a:r>
             <a:r>
               <a:rPr lang="en-US" dirty="0"/>
-              <a:t> instructions from earlier, which is a nice sanity check - and notice [1] through [4] showing 0.0s on a re-build is layer caching from the predict slide doing its job. The -t flag names the image so you can refer to it later, and the dot is the build context, the directory Docker is allowed to COPY from.</a:t>
+              <a:t/>
             </a:r>
             <a:endParaRPr dirty="0"/>
           </a:p>
@@ -5900,15 +5900,15 @@
             </a:pPr>
             <a:r>
               <a:rPr lang="en-US" dirty="0"/>
-              <a:t>docker run creates a fresh container from the image and starts it. The -p flag maps </a:t>
+              <a:t>docker run makes a fresh container from the image and starts it. -p maps host:container ports, and -e injects env vars the same way they'd set them in the Railway dashboard, so the mental model carries straight over. Spot-the-bug next on what happens when you forget the -p, so don't pre-explain it here.</a:t>
             </a:r>
             <a:r>
               <a:rPr lang="en-US" dirty="0" err="1"/>
-              <a:t>host:container</a:t>
+              <a:t/>
             </a:r>
             <a:r>
               <a:rPr lang="en-US" dirty="0"/>
-              <a:t> ports. The -e flag injects env vars the same way you'd set them in the Railway dashboard, so the mental model carries over. The next slide is a spot-the-bug on what happens when you forget -p - don't pre-explain it here.</a:t>
+              <a:t/>
             </a:r>
             <a:endParaRPr dirty="0"/>
           </a:p>
@@ -6066,15 +6066,15 @@
             </a:pPr>
             <a:r>
               <a:rPr lang="en-US" dirty="0"/>
-              <a:t>docker run creates a fresh container from the image and starts it. The -p flag maps </a:t>
+              <a:t>docker run makes a fresh container from the image and starts it. -p maps host:container ports, and -e injects env vars the same way they'd set them in the Railway dashboard, so the mental model carries straight over. Spot-the-bug next on what happens when you forget the -p, so don't pre-explain it here.</a:t>
             </a:r>
             <a:r>
               <a:rPr lang="en-US" dirty="0" err="1"/>
-              <a:t>host:container</a:t>
+              <a:t/>
             </a:r>
             <a:r>
               <a:rPr lang="en-US" dirty="0"/>
-              <a:t> ports. The -e flag injects env vars the same way you'd set them in the Railway dashboard, so the mental model carries over. The next slide is a spot-the-bug on what happens when you forget -p - don't pre-explain it here.</a:t>
+              <a:t/>
             </a:r>
             <a:endParaRPr dirty="0"/>
           </a:p>
@@ -6232,15 +6232,15 @@
             </a:pPr>
             <a:r>
               <a:rPr lang="en-US" dirty="0"/>
-              <a:t>Call-on-someone. The answer is (b): the docker run command has no -p. A container's ports are isolated by default - the app really is listening on 8000, but that's the CONTAINER's 8000, walled off from the laptop. Nothing forwards localhost:8000 to it. Air option (a) out loud, because it is the OTHER way to produce this exact symptom: binding </a:t>
+              <a:t>Call on someone. It's (b) - the docker run has no -p. Container ports are isolated by default, so the app really is listening on 8000, but that's the CONTAINER's 8000, walled off from the laptop, and nothing is forwarding localhost:8000 to it. Air option (a) out loud anyway, because it's the OTHER way to produce this exact symptom: bind uvicorn to 127.0.0.1 instead of 0.0.0.0 and it's unreachable from outside the container too. Here the log clearly says 0.0.0.0, so this one is the missing -p. From the browser those two look exactly the same, which is what makes it take an hour to find. Full explanation next slide.</a:t>
             </a:r>
             <a:r>
               <a:rPr lang="en-US" dirty="0" err="1"/>
-              <a:t>uvicorn</a:t>
+              <a:t/>
             </a:r>
             <a:r>
               <a:rPr lang="en-US" dirty="0"/>
-              <a:t> to 127.0.0.1 instead of 0.0.0.0 makes the app unreachable from outside the container too. Here the log clearly says 0.0.0.0, so this time it's the missing -p, not the bind address. Both failure modes look identical from the browser, which is the lesson. Next slide is the full explanation.</a:t>
+              <a:t/>
             </a:r>
             <a:endParaRPr dirty="0"/>
           </a:p>
@@ -6398,23 +6398,23 @@
             </a:pPr>
             <a:r>
               <a:rPr lang="en-US" dirty="0"/>
-              <a:t>Walk through every piece. .env is local-only. python-</a:t>
+              <a:t>Walk every piece. .env stays local, and python-dotenv loads it at startup if it's sitting there and quietly does nothing if it isn't...which is really the nice property here, because the same code then works in dev and in prod without a branch anywhere. On Railway the vars get injected directly so there's no .env on the server at all, and .gitignore is what keeps the file from ever hitting the repo.</a:t>
             </a:r>
             <a:r>
               <a:rPr lang="en-US" dirty="0" err="1"/>
-              <a:t>dotenv</a:t>
+              <a:t/>
             </a:r>
             <a:r>
               <a:rPr lang="en-US" dirty="0"/>
-              <a:t> loads it at startup if the file is present, otherwise does nothing...which is really the nice property that makes the same code work in dev and in prod. In production, Railway injects the vars directly, so .env isn't needed on the server. .</a:t>
+              <a:t/>
             </a:r>
             <a:r>
               <a:rPr lang="en-US" dirty="0" err="1"/>
-              <a:t>gitignore</a:t>
+              <a:t/>
             </a:r>
             <a:r>
               <a:rPr lang="en-US" dirty="0"/>
-              <a:t> keeps the secret file out of the repo.</a:t>
+              <a:t/>
             </a:r>
             <a:endParaRPr dirty="0"/>
           </a:p>
@@ -6572,7 +6572,7 @@
             </a:pPr>
             <a:r>
               <a:rPr lang="en-US" dirty="0"/>
-              <a:t>Port mapping confuses people because there are two 8000s in the air and they look identical. The container has its own network namespace with its own ports, and -p builds a bridge from a host port to a container port...they can be different numbers, and once you're running two containers at once they usually have to be. This is the explanation the spot-the-bug slide was setting up.</a:t>
+              <a:t>Port mapping confuses people because there are two 8000s in the air and they look identical on the page. The container has its own network namespace with its own ports, and -p builds a bridge from a host port to a container port...they don't have to be the same number, and once you're running two containers at once they can't be. This is what the spot-the-bug was setting up.</a:t>
             </a:r>
             <a:endParaRPr dirty="0"/>
           </a:p>
@@ -6730,7 +6730,7 @@
             </a:pPr>
             <a:r>
               <a:rPr lang="en-US" dirty="0"/>
-              <a:t>Port mapping confuses people because there are two 8000s in the air and they look identical. The container has its own network namespace with its own ports, and -p builds a bridge from a host port to a container port...they can be different numbers, and once you're running two containers at once they usually have to be. This is the explanation the spot-the-bug slide was setting up.</a:t>
+              <a:t>Port mapping confuses people because there are two 8000s in the air and they look identical on the page. The container has its own network namespace with its own ports, and -p builds a bridge from a host port to a container port...they don't have to be the same number, and once you're running two containers at once they can't be. This is what the spot-the-bug was setting up.</a:t>
             </a:r>
             <a:endParaRPr dirty="0"/>
           </a:p>
@@ -7614,7 +7614,7 @@
             </a:pPr>
             <a:r>
               <a:rPr lang="en-US" dirty="0"/>
-              <a:t>Call-on-someone, don't reveal. The answer is (c). Walk the room to it: COPY . . copies the entire build context, and if a student followed 7.2 they have a .env file sitting right there in the project root with a real database URL and a JWT secret in it. That file goes straight into an image layer, and image layers are not private - anyone who docker pulls the image, or pokes at it with docker history, can read it back out. (a) is the tempting wrong answer because people assume Docker is clever about this, and it just isn't: COPY copies exactly what you tell it to. The bug is quiet, too - the image still runs fine, the secret is just along for the ride. Next slide is the fix, and it ties straight back to the env var work from 7.2.</a:t>
+              <a:t>Call on someone, don't reveal. It's (c). Walk the room to it: COPY . . copies the entire build context, and if a student followed 7.2 they've got a .env sitting right there in the project root with a real database URL and a JWT secret in it. That file goes straight into an image layer, and image layers aren't private - anyone who docker pulls the image, or just pokes at it with docker history, can read it back out. (a) is the tempting wrong answer because people assume Docker is clever about this and it just isn't, COPY copies exactly what you told it to. And the bug is quiet, the image still runs fine, the secret is just along for the ride. The fix is next and it ties straight back to the env var work from 7.2.</a:t>
             </a:r>
             <a:endParaRPr dirty="0"/>
           </a:p>
@@ -7966,39 +7966,39 @@
             </a:pPr>
             <a:r>
               <a:rPr lang="en-US" dirty="0"/>
-              <a:t>The fix has two halves and students should take both. Build time: a .</a:t>
+              <a:t>Two halves to the fix and they should take both. Build time: a .dockerignore, which works exactly like .gitignore - a list of paths COPY . . will skip - so .env never gets into the image in the first place, and it's worth saying out loud that .git and __pycache__ belong in there too, mostly for size. Run time: the image carries zero secrets, and the actual values get handed to the container when it starts, either with -e on docker run, or --env-file, or on Railway straight from the dashboard variables they already set up back in 7.2. The reassuring part is that their app code doesn't change at all, it still reads os.environ exactly the same way, all that moved is where the values come from. Then close on the line from earlier: one image, identical everywhere, config is the thing that varies.</a:t>
             </a:r>
             <a:r>
               <a:rPr lang="en-US" dirty="0" err="1"/>
-              <a:t>dockerignore</a:t>
+              <a:t/>
             </a:r>
             <a:r>
               <a:rPr lang="en-US" dirty="0"/>
-              <a:t> file, which works exactly like .</a:t>
+              <a:t/>
             </a:r>
             <a:r>
               <a:rPr lang="en-US" dirty="0" err="1"/>
-              <a:t>gitignore</a:t>
+              <a:t/>
             </a:r>
             <a:r>
               <a:rPr lang="en-US" dirty="0"/>
-              <a:t> - a list of paths that COPY . . will skip - so .env never enters the image in the first place. Worth saying out loud that .git and __</a:t>
+              <a:t/>
             </a:r>
             <a:r>
               <a:rPr lang="en-US" dirty="0" err="1"/>
-              <a:t>pycache</a:t>
+              <a:t/>
             </a:r>
             <a:r>
               <a:rPr lang="en-US" dirty="0"/>
-              <a:t>__ belong in there too, mostly for image size. Run time: the image itself should carry zero secrets, and the actual values get handed to the container when it starts, either with -e on docker run, or with --env-file, or on Railway straight from the dashboard variables they already set up in 7.2. The throughline that should reassure students: their app code does not change at all, it still reads </a:t>
+              <a:t/>
             </a:r>
             <a:r>
               <a:rPr lang="en-US" dirty="0" err="1"/>
-              <a:t>os.environ</a:t>
+              <a:t/>
             </a:r>
             <a:r>
               <a:rPr lang="en-US" dirty="0"/>
-              <a:t> the same way - the only thing that moved is where the values come from. And the closing line is the idea from earlier in the lecture: one image, identical everywhere, with config as the thing that varies per environment.</a:t>
+              <a:t/>
             </a:r>
             <a:endParaRPr dirty="0"/>
           </a:p>
@@ -8156,39 +8156,39 @@
             </a:pPr>
             <a:r>
               <a:rPr lang="en-US" dirty="0"/>
-              <a:t>The fix has two halves and students should take both. Build time: a .</a:t>
+              <a:t>Two halves to the fix and they should take both. Build time: a .dockerignore, which works exactly like .gitignore - a list of paths COPY . . will skip - so .env never gets into the image in the first place, and it's worth saying out loud that .git and __pycache__ belong in there too, mostly for size. Run time: the image carries zero secrets, and the actual values get handed to the container when it starts, either with -e on docker run, or --env-file, or on Railway straight from the dashboard variables they already set up back in 7.2. The reassuring part is that their app code doesn't change at all, it still reads os.environ exactly the same way, all that moved is where the values come from. Then close on the line from earlier: one image, identical everywhere, config is the thing that varies.</a:t>
             </a:r>
             <a:r>
               <a:rPr lang="en-US" dirty="0" err="1"/>
-              <a:t>dockerignore</a:t>
+              <a:t/>
             </a:r>
             <a:r>
               <a:rPr lang="en-US" dirty="0"/>
-              <a:t> file, which works exactly like .</a:t>
+              <a:t/>
             </a:r>
             <a:r>
               <a:rPr lang="en-US" dirty="0" err="1"/>
-              <a:t>gitignore</a:t>
+              <a:t/>
             </a:r>
             <a:r>
               <a:rPr lang="en-US" dirty="0"/>
-              <a:t> - a list of paths that COPY . . will skip - so .env never enters the image in the first place. Worth saying out loud that .git and __</a:t>
+              <a:t/>
             </a:r>
             <a:r>
               <a:rPr lang="en-US" dirty="0" err="1"/>
-              <a:t>pycache</a:t>
+              <a:t/>
             </a:r>
             <a:r>
               <a:rPr lang="en-US" dirty="0"/>
-              <a:t>__ belong in there too, mostly for image size. Run time: the image itself should carry zero secrets, and the actual values get handed to the container when it starts, either with -e on docker run, or with --env-file, or on Railway straight from the dashboard variables they already set up in 7.2. The throughline that should reassure students: their app code does not change at all, it still reads </a:t>
+              <a:t/>
             </a:r>
             <a:r>
               <a:rPr lang="en-US" dirty="0" err="1"/>
-              <a:t>os.environ</a:t>
+              <a:t/>
             </a:r>
             <a:r>
               <a:rPr lang="en-US" dirty="0"/>
-              <a:t> the same way - the only thing that moved is where the values come from. And the closing line is the idea from earlier in the lecture: one image, identical everywhere, with config as the thing that varies per environment.</a:t>
+              <a:t/>
             </a:r>
             <a:endParaRPr dirty="0"/>
           </a:p>
@@ -8346,7 +8346,7 @@
             </a:pPr>
             <a:r>
               <a:rPr lang="en-US" dirty="0"/>
-              <a:t>The container they just built is not a course-only artifact - it's the unit the rest of the stack runs on.</a:t>
+              <a:t>What they just built is the actual unit the rest of the stack runs on, and that's worth saying plainly.</a:t>
             </a:r>
             <a:endParaRPr dirty="0"/>
           </a:p>
@@ -8504,7 +8504,7 @@
             </a:pPr>
             <a:r>
               <a:rPr lang="en-US" dirty="0"/>
-              <a:t>Slow down here and let it land. The container students built today is the literal unit the rest of the stack is made of. The CI callback is deliberate: 8.2 is next class, and the Ubuntu runner they'll use is itself a container, so today quietly sets that up. Kubernetes gets a namedrop and nothing more - don't teach it, just plant that the thing it orchestrates is the thing they now understand. The closing line restates the point plainly: these systems are all built from the one unit students just built themselves.</a:t>
+              <a:t>Slow down and let this land. The container they built today is the literal unit the rest of the stack is made out of. CI callback is deliberate - 8.2 is next class and the Ubuntu runner they'll be using is itself a container, so today quietly sets that up. Kubernetes gets a namedrop and nothing more, don't teach it, just plant the idea that the thing it orchestrates is the thing they now understand. Close plainly: all of these systems are built out of the one unit they just built themselves.</a:t>
             </a:r>
             <a:endParaRPr dirty="0"/>
           </a:p>
@@ -8662,23 +8662,23 @@
             </a:pPr>
             <a:r>
               <a:rPr lang="en-US" dirty="0"/>
-              <a:t>The drop-in nature of Railway's </a:t>
+              <a:t>The drop-in thing is what to hammer home - they don't switch tools or redo anything, they add one file to the Railway project they already have and suddenly they control the environment. Everything from 7.2 still holds, there's just a Dockerfile sitting on top of it now.</a:t>
             </a:r>
             <a:r>
               <a:rPr lang="en-US" dirty="0" err="1"/>
-              <a:t>Dockerfile</a:t>
+              <a:t/>
             </a:r>
             <a:r>
               <a:rPr lang="en-US" dirty="0"/>
-              <a:t> support is the key thing to hammer home - students don't switch tools, they add one file to the existing Railway project and suddenly they control the environment. It's a clean upgrade story, and it means the workflow from 7.2 still holds, just with a </a:t>
+              <a:t/>
             </a:r>
             <a:r>
               <a:rPr lang="en-US" dirty="0" err="1"/>
-              <a:t>Dockerfile</a:t>
+              <a:t/>
             </a:r>
             <a:r>
               <a:rPr lang="en-US" dirty="0"/>
-              <a:t> on top.</a:t>
+              <a:t/>
             </a:r>
             <a:endParaRPr dirty="0"/>
           </a:p>
@@ -8836,23 +8836,23 @@
             </a:pPr>
             <a:r>
               <a:rPr lang="en-US" dirty="0"/>
-              <a:t>Walk through every piece. .env is local-only. python-</a:t>
+              <a:t>Walk every piece. .env stays local, and python-dotenv loads it at startup if it's sitting there and quietly does nothing if it isn't...which is really the nice property here, because the same code then works in dev and in prod without a branch anywhere. On Railway the vars get injected directly so there's no .env on the server at all, and .gitignore is what keeps the file from ever hitting the repo.</a:t>
             </a:r>
             <a:r>
               <a:rPr lang="en-US" dirty="0" err="1"/>
-              <a:t>dotenv</a:t>
+              <a:t/>
             </a:r>
             <a:r>
               <a:rPr lang="en-US" dirty="0"/>
-              <a:t> loads it at startup if the file is present, otherwise does nothing...which is really the nice property that makes the same code work in dev and in prod. In production, Railway injects the vars directly, so .env isn't needed on the server. .</a:t>
+              <a:t/>
             </a:r>
             <a:r>
               <a:rPr lang="en-US" dirty="0" err="1"/>
-              <a:t>gitignore</a:t>
+              <a:t/>
             </a:r>
             <a:r>
               <a:rPr lang="en-US" dirty="0"/>
-              <a:t> keeps the secret file out of the repo.</a:t>
+              <a:t/>
             </a:r>
             <a:endParaRPr dirty="0"/>
           </a:p>
@@ -9010,7 +9010,7 @@
             </a:pPr>
             <a:r>
               <a:rPr lang="en-US" dirty="0"/>
-              <a:t>Honest judgment-call slide - don't reach for Docker reflexively, the auto-builder is good and most small projects don't need this level of control. But note the reframed closing line: the value of today is not 'an escape hatch you might use someday,' it's understanding what every deploy actually ships. The four bullets are real triggers worth knowing by name. The same-image-everywhere bullet matters most as projects grow - it's what makes a green CI check actually trustworthy.</a:t>
+              <a:t>Honest judgment-call slide, and don't let them walk out reaching for Docker reflexively - the auto-builder is good and most small projects don't need this much control. What today was actually worth is understanding what every deploy is shipping, which is a different thing from having an escape hatch you might use someday. The four bullets are real triggers worth knowing by name, and the same-image-everywhere one matters more the bigger the project gets, because it's what makes a green CI check worth anything.</a:t>
             </a:r>
             <a:endParaRPr dirty="0"/>
           </a:p>
@@ -9550,7 +9550,7 @@
             </a:pPr>
             <a:r>
               <a:rPr lang="en-US"/>
-              <a:t>Walk through each answer. The --no-cache-dir flag is a small win - pip caches downloads in ~/.cache/pip by default and those cached files end up baked into your image, bloating it for no reason, so --no-cache-dir just skips that. The 0.0.0.0 bind address instead of 127.0.0.1 is CRITICAL though, and it's the same bug as the spot-the-bug slide: 127.0.0.1 binds to loopback, which from inside the container is unreachable from outside. 0.0.0.0 binds to all interfaces, which is what you want.</a:t>
+              <a:t>Walk each answer. --no-cache-dir is a small win - pip caches downloads in ~/.cache/pip by default and those cached files get baked into the image for no reason at all, so the flag just skips it. The 0.0.0.0 bind instead of 127.0.0.1 is CRITICAL though, and it's the same bug as the spot-the-bug slide: 127.0.0.1 binds to loopback, which from inside the container means nothing outside can reach it. 0.0.0.0 binds to all interfaces, which is what you want.</a:t>
             </a:r>
             <a:endParaRPr/>
           </a:p>
@@ -9708,7 +9708,7 @@
             </a:pPr>
             <a:r>
               <a:rPr lang="en-US" dirty="0"/>
-              <a:t>Recap the three mechanical ideas, then restate the wider point - the container students built today is what CI runners and cloud platforms are made of. Point forward to 8.2, which closes a loop two ways: the tests students wrote in 4.x finally run automatically on every push, and the machine they run on is a container, the exact thing this lecture was about. That callback is worth saying out loud - it makes 8.1 and 8.2 feel like one arc.</a:t>
+              <a:t>Recap the three mechanical ideas, then the wider one: the container they built today is what CI runners and cloud platforms are made of. Point at 8.2, which closes a loop two ways - the tests they wrote back in 4.x finally run automatically on every push, and the machine those tests run on is a container, the exact thing this lecture was about. Worth saying out loud, because it makes 8.1 and 8.2 land as one arc instead of two lectures.</a:t>
             </a:r>
             <a:endParaRPr dirty="0"/>
           </a:p>
@@ -9866,23 +9866,23 @@
             </a:pPr>
             <a:r>
               <a:rPr lang="en-US" dirty="0"/>
-              <a:t>Walk through every piece. .env is local-only. python-</a:t>
+              <a:t>Walk every piece. .env stays local, and python-dotenv loads it at startup if it's sitting there and quietly does nothing if it isn't...which is really the nice property here, because the same code then works in dev and in prod without a branch anywhere. On Railway the vars get injected directly so there's no .env on the server at all, and .gitignore is what keeps the file from ever hitting the repo.</a:t>
             </a:r>
             <a:r>
               <a:rPr lang="en-US" dirty="0" err="1"/>
-              <a:t>dotenv</a:t>
+              <a:t/>
             </a:r>
             <a:r>
               <a:rPr lang="en-US" dirty="0"/>
-              <a:t> loads it at startup if the file is present, otherwise does nothing...which is really the nice property that makes the same code work in dev and in prod. In production, Railway injects the vars directly, so .env isn't needed on the server. .</a:t>
+              <a:t/>
             </a:r>
             <a:r>
               <a:rPr lang="en-US" dirty="0" err="1"/>
-              <a:t>gitignore</a:t>
+              <a:t/>
             </a:r>
             <a:r>
               <a:rPr lang="en-US" dirty="0"/>
-              <a:t> keeps the secret file out of the repo.</a:t>
+              <a:t/>
             </a:r>
             <a:endParaRPr dirty="0"/>
           </a:p>
@@ -10040,7 +10040,7 @@
             </a:pPr>
             <a:r>
               <a:rPr lang="en-US" dirty="0"/>
-              <a:t>Open by naming the elephant: their deploys already work. Then earn the lecture back with the industry-fluency thesis before any Docker vocabulary shows up.</a:t>
+              <a:t>Open by naming the elephant - their deploys already work, so why are we here. Get that said out loud before any Docker vocabulary shows up, otherwise they spend the first twenty minutes quietly wondering.</a:t>
             </a:r>
             <a:endParaRPr dirty="0"/>
           </a:p>
@@ -10216,15 +10216,15 @@
             </a:pPr>
             <a:r>
               <a:rPr lang="en-US" dirty="0"/>
-              <a:t>This is the slide that has to do the motivational heavy lifting, so don't rush it. Say the quiet part first: yes, Railway already works, no, you probably won't strictly need a </a:t>
+              <a:t>Don't rush this one. Concede the whole thing up front, that Railway works and they probably won't strictly need a Dockerfile for the final project, because if I pretend otherwise they'll know. The argument for spending 75 minutes on it is that containers are the substrate under basically everything they'll touch after this class, and an engineer who's never opened one up is treating half their tooling as a black box...which works fine right up until the day it doesn't. CI is literally next class and it runs on this, so the callback is worth making. Close on what they walk out with: by the end of today 'the cloud' is a thing they can describe out loud.</a:t>
             </a:r>
             <a:r>
               <a:rPr lang="en-US" dirty="0" err="1"/>
-              <a:t>Dockerfile</a:t>
+              <a:t/>
             </a:r>
             <a:r>
               <a:rPr lang="en-US" dirty="0"/>
-              <a:t> for the project. Then pivot hard. The reason to spend 75 minutes here isn't necessity, it's fluency - containers really are the substrate the whole stack is built on, and an engineer who doesn't understand them is working with half their tooling as a black box. The CI callback is deliberate: it's literally next class. End on the promise - by the end of today, 'the cloud' is a concrete thing you can describe.</a:t>
+              <a:t/>
             </a:r>
             <a:endParaRPr dirty="0"/>
           </a:p>
@@ -10393,15 +10393,15 @@
             </a:pPr>
             <a:r>
               <a:rPr lang="en-US" dirty="0"/>
-              <a:t>This is the slide that has to do the motivational heavy lifting, so don't rush it. Say the quiet part first: yes, Railway already works, no, you probably won't strictly need a </a:t>
+              <a:t>Don't rush this one. Concede the whole thing up front, that Railway works and they probably won't strictly need a Dockerfile for the final project, because if I pretend otherwise they'll know. The argument for spending 75 minutes on it is that containers are the substrate under basically everything they'll touch after this class, and an engineer who's never opened one up is treating half their tooling as a black box...which works fine right up until the day it doesn't. CI is literally next class and it runs on this, so the callback is worth making. Close on what they walk out with: by the end of today 'the cloud' is a thing they can describe out loud.</a:t>
             </a:r>
             <a:r>
               <a:rPr lang="en-US" dirty="0" err="1"/>
-              <a:t>Dockerfile</a:t>
+              <a:t/>
             </a:r>
             <a:r>
               <a:rPr lang="en-US" dirty="0"/>
-              <a:t> for the project. Then pivot hard. The reason to spend 75 minutes here isn't necessity, it's fluency - containers really are the substrate the whole stack is built on, and an engineer who doesn't understand them is working with half their tooling as a black box. The CI callback is deliberate: it's literally next class. End on the promise - by the end of today, 'the cloud' is a concrete thing you can describe.</a:t>
+              <a:t/>
             </a:r>
             <a:endParaRPr dirty="0"/>
           </a:p>

--- a/lectures/Lecture 8.1 - Docker.pptx
+++ b/lectures/Lecture 8.1 - Docker.pptx
@@ -1014,28 +1014,9 @@
           </a:bodyPr>
           <a:lstStyle/>
           <a:p>
-            <a:pPr marL="0" lvl="0" indent="0" algn="l" rtl="0">
-              <a:spcBef>
-                <a:spcPts val="0"/>
-              </a:spcBef>
-              <a:spcAft>
-                <a:spcPts val="0"/>
-              </a:spcAft>
-              <a:buNone/>
-            </a:pPr>
-            <a:r>
-              <a:rPr lang="en-US" dirty="0"/>
-              <a:t>Small surprise here, and it should land as one: they've been using containers for weeks and just didn't have the word for it. nixpacks poked at their repo, guessed a Python version, installed a bunch of stuff, and what came out the other end was a container image. Which is a nice way in, because now Docker stops being some new world they have to go learn and turns into the same thing they've been doing all along with the lid off. The PaaS trade is smart defaults in exchange for not getting to choose, and today is really about the cases where you want to choose.</a:t>
-            </a:r>
-            <a:r>
-              <a:rPr lang="en-US" dirty="0" err="1"/>
-              <a:t/>
-            </a:r>
-            <a:r>
-              <a:rPr lang="en-US" dirty="0"/>
-              <a:t/>
-            </a:r>
-            <a:endParaRPr dirty="0"/>
+            <a:r>
+              <a:t>They've been shipping containers for weeks without the word.</a:t>
+            </a:r>
           </a:p>
         </p:txBody>
       </p:sp>
@@ -1180,20 +1161,9 @@
           </a:bodyPr>
           <a:lstStyle/>
           <a:p>
-            <a:pPr marL="0" lvl="0" indent="0" algn="l" rtl="0">
-              <a:spcBef>
-                <a:spcPts val="0"/>
-              </a:spcBef>
-              <a:spcAft>
-                <a:spcPts val="0"/>
-              </a:spcAft>
-              <a:buNone/>
-            </a:pPr>
-            <a:r>
-              <a:rPr lang="en-US" dirty="0"/>
-              <a:t>Python version, the OS itself, installed system libraries, C libraries the wheels link against, environment variables, file paths, locale, CPU architecture (arm vs x86), what's on PATH, a different version of the same pip package. Write every answer up on the board. Then once it's full: a container freezes ALL of this into the image, so the whole list stops mattering at once. Which sets up the design question nicely, because they'll have just written the problem out in their own words and the answer lands as theirs instead of mine.</a:t>
-            </a:r>
-            <a:endParaRPr dirty="0"/>
+            <a:r>
+              <a:t>Board it: Python, OS, C libs, env vars, arch. Then: image freezes all of it.</a:t>
+            </a:r>
           </a:p>
         </p:txBody>
       </p:sp>
@@ -1338,20 +1308,9 @@
           </a:bodyPr>
           <a:lstStyle/>
           <a:p>
-            <a:pPr marL="0" lvl="0" indent="0" algn="l" rtl="0">
-              <a:spcBef>
-                <a:spcPts val="0"/>
-              </a:spcBef>
-              <a:spcAft>
-                <a:spcPts val="0"/>
-              </a:spcAft>
-              <a:buNone/>
-            </a:pPr>
-            <a:r>
-              <a:rPr lang="en-US" dirty="0"/>
-              <a:t>The classic 'works on my machine' dance, and it really is a rite of passage - anyone who's deployed something non-trivial has felt a version of it. Make the pain concrete before naming any solution. The move to get them to make here is splitting 'your code' from 'your dependencies,' because students think of their app as one thing and none of the Docker story lands until those are two separate things in their head.</a:t>
-            </a:r>
-            <a:endParaRPr dirty="0"/>
+            <a:r>
+              <a:t>Don't name Docker yet; make the pain concrete first.</a:t>
+            </a:r>
           </a:p>
         </p:txBody>
       </p:sp>
@@ -1514,28 +1473,9 @@
           </a:bodyPr>
           <a:lstStyle/>
           <a:p>
-            <a:pPr marL="0" lvl="0" indent="0" algn="l" rtl="0">
-              <a:spcBef>
-                <a:spcPts val="0"/>
-              </a:spcBef>
-              <a:spcAft>
-                <a:spcPts val="0"/>
-              </a:spcAft>
-              <a:buNone/>
-            </a:pPr>
-            <a:r>
-              <a:rPr lang="en-US" dirty="0"/>
-              <a:t>Step back and let them feel the design space before naming a winner. Everything on that list is something people actually tried, and each one has a real failure mode - READMEs rot, VMs are slow and heavy, and getting two machines bit-identical by hand is basically impossible. Docker won because it lands at kinda the right level, way lighter than a VM and a whole lot more reliable than hoping.</a:t>
-            </a:r>
-            <a:r>
-              <a:rPr lang="en-US" dirty="0" err="1"/>
-              <a:t/>
-            </a:r>
-            <a:r>
-              <a:rPr lang="en-US" dirty="0"/>
-              <a:t/>
-            </a:r>
-            <a:endParaRPr dirty="0"/>
+            <a:r>
+              <a:t>Ask why each option fails before the reveal.</a:t>
+            </a:r>
           </a:p>
         </p:txBody>
       </p:sp>
@@ -1691,28 +1631,9 @@
           </a:bodyPr>
           <a:lstStyle/>
           <a:p>
-            <a:pPr marL="0" lvl="0" indent="0" algn="l" rtl="0">
-              <a:spcBef>
-                <a:spcPts val="0"/>
-              </a:spcBef>
-              <a:spcAft>
-                <a:spcPts val="0"/>
-              </a:spcAft>
-              <a:buNone/>
-            </a:pPr>
-            <a:r>
-              <a:rPr lang="en-US" dirty="0"/>
-              <a:t>Step back and let them feel the design space before naming a winner. Everything on that list is something people actually tried, and each one has a real failure mode - READMEs rot, VMs are slow and heavy, and getting two machines bit-identical by hand is basically impossible. Docker won because it lands at kinda the right level, way lighter than a VM and a whole lot more reliable than hoping.</a:t>
-            </a:r>
-            <a:r>
-              <a:rPr lang="en-US" dirty="0" err="1"/>
-              <a:t/>
-            </a:r>
-            <a:r>
-              <a:rPr lang="en-US" dirty="0"/>
-              <a:t/>
-            </a:r>
-            <a:endParaRPr dirty="0"/>
+            <a:r>
+              <a:t>Ask why each option fails before the reveal.</a:t>
+            </a:r>
           </a:p>
         </p:txBody>
       </p:sp>
@@ -1856,22 +1777,7 @@
             <a:noAutofit/>
           </a:bodyPr>
           <a:lstStyle/>
-          <a:p>
-            <a:pPr marL="0" lvl="0" indent="0" algn="l" rtl="0">
-              <a:spcBef>
-                <a:spcPts val="0"/>
-              </a:spcBef>
-              <a:spcAft>
-                <a:spcPts val="0"/>
-              </a:spcAft>
-              <a:buNone/>
-            </a:pPr>
-            <a:r>
-              <a:rPr lang="en-US" dirty="0"/>
-              <a:t>Image vs container is the distinction that matters, and a lot of the confusion later in the lecture traces back to students quietly conflating the two. The 'prove it' slide next makes the claim physical instead of me just asserting it.</a:t>
-            </a:r>
-            <a:endParaRPr dirty="0"/>
-          </a:p>
+          <a:p/>
         </p:txBody>
       </p:sp>
       <p:sp>
@@ -2014,22 +1920,7 @@
             <a:noAutofit/>
           </a:bodyPr>
           <a:lstStyle/>
-          <a:p>
-            <a:pPr marL="0" lvl="0" indent="0" algn="l" rtl="0">
-              <a:spcBef>
-                <a:spcPts val="0"/>
-              </a:spcBef>
-              <a:spcAft>
-                <a:spcPts val="0"/>
-              </a:spcAft>
-              <a:buNone/>
-            </a:pPr>
-            <a:r>
-              <a:rPr lang="en-US" dirty="0"/>
-              <a:t>If they remember one thing from today, it's that a container is a PROCESS. The host kernel is lying to it convincingly enough that the process thinks it's alone on a fresh machine, and since there's no second kernel getting booted anywhere, startup is milliseconds instead of the minute-plus you'd sit through on a VM...which is most of why containers took over. Next slide proves it instead of asking them to take my word for it.</a:t>
-            </a:r>
-            <a:endParaRPr dirty="0"/>
-          </a:p>
+          <a:p/>
         </p:txBody>
       </p:sp>
       <p:sp>
@@ -2173,36 +2064,9 @@
           </a:bodyPr>
           <a:lstStyle/>
           <a:p>
-            <a:pPr marL="0" lvl="0" indent="0" algn="l" rtl="0">
-              <a:spcBef>
-                <a:spcPts val="0"/>
-              </a:spcBef>
-              <a:spcAft>
-                <a:spcPts val="0"/>
-              </a:spcAft>
-              <a:buNone/>
-            </a:pPr>
-            <a:r>
-              <a:rPr lang="en-US" dirty="0"/>
-              <a:t>Make the claim physical here. Two demos, both worth running live if the projector cooperates - start the container detached, then ps on the host, and there's the container's uvicorn sitting right in your own process list, because that is all it ever was. Then docker run -it ... bash drops you into what looks like a brand-new Linux box, its own filesystem, its own root user, and you exit and there's nothing left behind. This is usually where 'the cloud is just processes' clicks for people.</a:t>
-            </a:r>
-            <a:r>
-              <a:rPr lang="en-US" dirty="0" err="1"/>
-              <a:t/>
-            </a:r>
-            <a:r>
-              <a:rPr lang="en-US" dirty="0"/>
-              <a:t/>
-            </a:r>
-            <a:r>
-              <a:rPr lang="en-US" dirty="0" err="1"/>
-              <a:t/>
-            </a:r>
-            <a:r>
-              <a:rPr lang="en-US" dirty="0"/>
-              <a:t/>
-            </a:r>
-            <a:endParaRPr dirty="0"/>
+            <a:r>
+              <a:t>Run both demos live; fallback: walk the slide output.</a:t>
+            </a:r>
           </a:p>
         </p:txBody>
       </p:sp>
@@ -2347,36 +2211,9 @@
           </a:bodyPr>
           <a:lstStyle/>
           <a:p>
-            <a:pPr marL="0" lvl="0" indent="0" algn="l" rtl="0">
-              <a:spcBef>
-                <a:spcPts val="0"/>
-              </a:spcBef>
-              <a:spcAft>
-                <a:spcPts val="0"/>
-              </a:spcAft>
-              <a:buNone/>
-            </a:pPr>
-            <a:r>
-              <a:rPr lang="en-US" dirty="0"/>
-              <a:t>Make the claim physical here. Two demos, both worth running live if the projector cooperates - start the container detached, then ps on the host, and there's the container's uvicorn sitting right in your own process list, because that is all it ever was. Then docker run -it ... bash drops you into what looks like a brand-new Linux box, its own filesystem, its own root user, and you exit and there's nothing left behind. This is usually where 'the cloud is just processes' clicks for people.</a:t>
-            </a:r>
-            <a:r>
-              <a:rPr lang="en-US" dirty="0" err="1"/>
-              <a:t/>
-            </a:r>
-            <a:r>
-              <a:rPr lang="en-US" dirty="0"/>
-              <a:t/>
-            </a:r>
-            <a:r>
-              <a:rPr lang="en-US" dirty="0" err="1"/>
-              <a:t/>
-            </a:r>
-            <a:r>
-              <a:rPr lang="en-US" dirty="0"/>
-              <a:t/>
-            </a:r>
-            <a:endParaRPr dirty="0"/>
+            <a:r>
+              <a:t>Run both demos live; fallback: walk the slide output.</a:t>
+            </a:r>
           </a:p>
         </p:txBody>
       </p:sp>
@@ -2521,36 +2358,9 @@
           </a:bodyPr>
           <a:lstStyle/>
           <a:p>
-            <a:pPr marL="0" lvl="0" indent="0" algn="l" rtl="0">
-              <a:spcBef>
-                <a:spcPts val="0"/>
-              </a:spcBef>
-              <a:spcAft>
-                <a:spcPts val="0"/>
-              </a:spcAft>
-              <a:buNone/>
-            </a:pPr>
-            <a:r>
-              <a:rPr lang="en-US" dirty="0"/>
-              <a:t>Make the claim physical here. Two demos, both worth running live if the projector cooperates - start the container detached, then ps on the host, and there's the container's uvicorn sitting right in your own process list, because that is all it ever was. Then docker run -it ... bash drops you into what looks like a brand-new Linux box, its own filesystem, its own root user, and you exit and there's nothing left behind. This is usually where 'the cloud is just processes' clicks for people.</a:t>
-            </a:r>
-            <a:r>
-              <a:rPr lang="en-US" dirty="0" err="1"/>
-              <a:t/>
-            </a:r>
-            <a:r>
-              <a:rPr lang="en-US" dirty="0"/>
-              <a:t/>
-            </a:r>
-            <a:r>
-              <a:rPr lang="en-US" dirty="0" err="1"/>
-              <a:t/>
-            </a:r>
-            <a:r>
-              <a:rPr lang="en-US" dirty="0"/>
-              <a:t/>
-            </a:r>
-            <a:endParaRPr dirty="0"/>
+            <a:r>
+              <a:t>Run both demos live; fallback: walk the slide output.</a:t>
+            </a:r>
           </a:p>
         </p:txBody>
       </p:sp>
@@ -2694,30 +2504,7 @@
             <a:noAutofit/>
           </a:bodyPr>
           <a:lstStyle/>
-          <a:p>
-            <a:pPr marL="0" lvl="0" indent="0" algn="l" rtl="0">
-              <a:spcBef>
-                <a:spcPts val="0"/>
-              </a:spcBef>
-              <a:spcAft>
-                <a:spcPts val="0"/>
-              </a:spcAft>
-              <a:buNone/>
-            </a:pPr>
-            <a:r>
-              <a:rPr lang="en-US" dirty="0"/>
-              <a:t>Routes first, static mount second, or the mount swallows your API paths. And html=True is the bit that makes it hand back index.html for any path that isn't a real file on disk, which is what client-side routing needs to work at all.</a:t>
-            </a:r>
-            <a:r>
-              <a:rPr lang="en-US" dirty="0" err="1"/>
-              <a:t/>
-            </a:r>
-            <a:r>
-              <a:rPr lang="en-US" dirty="0"/>
-              <a:t/>
-            </a:r>
-            <a:endParaRPr dirty="0"/>
-          </a:p>
+          <a:p/>
         </p:txBody>
       </p:sp>
       <p:sp>
@@ -2861,20 +2648,9 @@
           </a:bodyPr>
           <a:lstStyle/>
           <a:p>
-            <a:pPr marL="0" lvl="0" indent="0" algn="l" rtl="0">
-              <a:spcBef>
-                <a:spcPts val="0"/>
-              </a:spcBef>
-              <a:spcAft>
-                <a:spcPts val="0"/>
-              </a:spcAft>
-              <a:buNone/>
-            </a:pPr>
-            <a:r>
-              <a:rPr lang="en-US" dirty="0"/>
-              <a:t>The class-vs-instance analogy lands for anyone who's done OOP, which is all of them. Drive home the verbs - you build an image, and then you run containers FROM it...that wording matters because the CLI commands coming up use exactly those words, and anyone who's mushed the two together is gonna get lost fast.</a:t>
-            </a:r>
-            <a:endParaRPr dirty="0"/>
+            <a:r>
+              <a:t>Same verbs as the CLI coming up: build the image, run the container.</a:t>
+            </a:r>
           </a:p>
         </p:txBody>
       </p:sp>
@@ -3019,20 +2795,9 @@
           </a:bodyPr>
           <a:lstStyle/>
           <a:p>
-            <a:pPr marL="0" lvl="0" indent="0" algn="l" rtl="0">
-              <a:spcBef>
-                <a:spcPts val="0"/>
-              </a:spcBef>
-              <a:spcAft>
-                <a:spcPts val="0"/>
-              </a:spcAft>
-              <a:buNone/>
-            </a:pPr>
-            <a:r>
-              <a:rPr lang="en-US" dirty="0"/>
-              <a:t>The class-vs-instance analogy lands for anyone who's done OOP, which is all of them. Drive home the verbs - you build an image, and then you run containers FROM it...that wording matters because the CLI commands coming up use exactly those words, and anyone who's mushed the two together is gonna get lost fast.</a:t>
-            </a:r>
-            <a:endParaRPr dirty="0"/>
+            <a:r>
+              <a:t>Same verbs as the CLI coming up: build the image, run the container.</a:t>
+            </a:r>
           </a:p>
         </p:txBody>
       </p:sp>
@@ -3177,76 +2942,9 @@
           </a:bodyPr>
           <a:lstStyle/>
           <a:p>
-            <a:pPr marL="0" lvl="0" indent="0" algn="l" rtl="0">
-              <a:spcBef>
-                <a:spcPts val="0"/>
-              </a:spcBef>
-              <a:spcAft>
-                <a:spcPts val="0"/>
-              </a:spcAft>
-              <a:buNone/>
-            </a:pPr>
-            <a:r>
-              <a:rPr lang="en-US" dirty="0"/>
-              <a:t>The two-step flow - grab a base image someone else maintains, then layer your stuff on top - is how every real </a:t>
-            </a:r>
-            <a:r>
-              <a:rPr lang="en-US" dirty="0" err="1"/>
-              <a:t>Dockerfile</a:t>
-            </a:r>
-            <a:r>
-              <a:rPr lang="en-US" dirty="0"/>
-              <a:t> works. You basically never start from scratch - you start from something like python:3.12-slim that the Python team keeps patched, and then add whatever your app specifically needs on top. And a registry is just a place images live, same as GitHub is a place repos live.</a:t>
-            </a:r>
-            <a:endParaRPr dirty="0"/>
-          </a:p>
-          <a:p>
-            <a:pPr marL="0" lvl="0" indent="0" algn="l" rtl="0">
-              <a:spcBef>
-                <a:spcPts val="0"/>
-              </a:spcBef>
-              <a:spcAft>
-                <a:spcPts val="0"/>
-              </a:spcAft>
-              <a:buNone/>
-            </a:pPr>
-            <a:endParaRPr dirty="0"/>
-          </a:p>
-          <a:p>
-            <a:pPr marL="0" lvl="0" indent="0" algn="l" rtl="0">
-              <a:spcBef>
-                <a:spcPts val="0"/>
-              </a:spcBef>
-              <a:spcAft>
-                <a:spcPts val="0"/>
-              </a:spcAft>
-              <a:buNone/>
-            </a:pPr>
-            <a:r>
-              <a:rPr lang="en-US" dirty="0"/>
-              <a:t>Next: what a </a:t>
-            </a:r>
-            <a:r>
-              <a:rPr lang="en-US" dirty="0" err="1"/>
-              <a:t>Dockerfile</a:t>
-            </a:r>
-            <a:r>
-              <a:rPr lang="en-US" dirty="0"/>
-              <a:t> actually looks like.</a:t>
-            </a:r>
-            <a:endParaRPr dirty="0"/>
-          </a:p>
-          <a:p>
-            <a:pPr marL="0" lvl="0" indent="0" algn="l" rtl="0">
-              <a:spcBef>
-                <a:spcPts val="0"/>
-              </a:spcBef>
-              <a:spcAft>
-                <a:spcPts val="0"/>
-              </a:spcAft>
-              <a:buNone/>
-            </a:pPr>
-            <a:endParaRPr dirty="0"/>
+            <a:r>
+              <a:t>Registry is to images what GitHub is to repos.</a:t>
+            </a:r>
           </a:p>
         </p:txBody>
       </p:sp>
@@ -3390,30 +3088,7 @@
             <a:noAutofit/>
           </a:bodyPr>
           <a:lstStyle/>
-          <a:p>
-            <a:pPr marL="0" lvl="0" indent="0" algn="l" rtl="0">
-              <a:spcBef>
-                <a:spcPts val="0"/>
-              </a:spcBef>
-              <a:spcAft>
-                <a:spcPts val="0"/>
-              </a:spcAft>
-              <a:buNone/>
-            </a:pPr>
-            <a:r>
-              <a:rPr lang="en-US" dirty="0"/>
-              <a:t>The actual file students would write if they reached for Docker. Ground it with a real </a:t>
-            </a:r>
-            <a:r>
-              <a:rPr lang="en-US" dirty="0" err="1"/>
-              <a:t>FastAPI</a:t>
-            </a:r>
-            <a:r>
-              <a:rPr lang="en-US" dirty="0"/>
-              <a:t> example because that's what they already have in hand.</a:t>
-            </a:r>
-            <a:endParaRPr dirty="0"/>
-          </a:p>
+          <a:p/>
         </p:txBody>
       </p:sp>
       <p:sp>
@@ -3556,38 +3231,7 @@
             <a:noAutofit/>
           </a:bodyPr>
           <a:lstStyle/>
-          <a:p>
-            <a:pPr marL="0" lvl="0" indent="0" algn="l" rtl="0">
-              <a:spcBef>
-                <a:spcPts val="0"/>
-              </a:spcBef>
-              <a:spcAft>
-                <a:spcPts val="0"/>
-              </a:spcAft>
-              <a:buNone/>
-            </a:pPr>
-            <a:r>
-              <a:rPr lang="en-US" dirty="0"/>
-              <a:t>Five instructions really do cover almost every Dockerfile you'll write for a long while. FROM is the base, WORKDIR is where the rest of the commands run from, COPY brings your code in, RUN is stuff that happens at build time, and CMD is what actually runs when the container starts...learn those five and you can read the overwhelming majority of Dockerfiles in the wild. The rest is edge cases.</a:t>
-            </a:r>
-            <a:r>
-              <a:rPr lang="en-US" dirty="0" err="1"/>
-              <a:t/>
-            </a:r>
-            <a:r>
-              <a:rPr lang="en-US" dirty="0"/>
-              <a:t/>
-            </a:r>
-            <a:r>
-              <a:rPr lang="en-US" dirty="0" err="1"/>
-              <a:t/>
-            </a:r>
-            <a:r>
-              <a:rPr lang="en-US" dirty="0"/>
-              <a:t/>
-            </a:r>
-            <a:endParaRPr dirty="0"/>
-          </a:p>
+          <a:p/>
         </p:txBody>
       </p:sp>
       <p:sp>
@@ -3731,20 +3375,9 @@
           </a:bodyPr>
           <a:lstStyle/>
           <a:p>
-            <a:pPr marL="0" lvl="0" indent="0" algn="l" rtl="0">
-              <a:spcBef>
-                <a:spcPts val="0"/>
-              </a:spcBef>
-              <a:spcAft>
-                <a:spcPts val="0"/>
-              </a:spcAft>
-              <a:buNone/>
-            </a:pPr>
-            <a:r>
-              <a:rPr lang="en-US" dirty="0"/>
-              <a:t>Walk it line by line. FROM pulls a minimal Python 3.12 base, WORKDIR makes /app inside the image so everything after it runs from there, then COPY requirements and RUN pip install is the installs-deps dance...and THEN we COPY the rest of the code. That ordering is doing real work, and it's the whole caching story on the next few slides. CMD is just the default command when someone runs the container.</a:t>
-            </a:r>
-            <a:endParaRPr dirty="0"/>
+            <a:r>
+              <a:t>Flag the deps-before-code order; explain why on the caching slides.</a:t>
+            </a:r>
           </a:p>
         </p:txBody>
       </p:sp>
@@ -3889,20 +3522,9 @@
           </a:bodyPr>
           <a:lstStyle/>
           <a:p>
-            <a:pPr marL="0" lvl="0" indent="0" algn="l" rtl="0">
-              <a:spcBef>
-                <a:spcPts val="0"/>
-              </a:spcBef>
-              <a:spcAft>
-                <a:spcPts val="0"/>
-              </a:spcAft>
-              <a:buNone/>
-            </a:pPr>
-            <a:r>
-              <a:rPr lang="en-US" dirty="0"/>
-              <a:t>Walk it line by line. FROM pulls a minimal Python 3.12 base, WORKDIR makes /app inside the image so everything after it runs from there, then COPY requirements and RUN pip install is the installs-deps dance...and THEN we COPY the rest of the code. That ordering is doing real work, and it's the whole caching story on the next few slides. CMD is just the default command when someone runs the container.</a:t>
-            </a:r>
-            <a:endParaRPr dirty="0"/>
+            <a:r>
+              <a:t>Flag the deps-before-code order; explain why on the caching slides.</a:t>
+            </a:r>
           </a:p>
         </p:txBody>
       </p:sp>
@@ -4047,20 +3669,9 @@
           </a:bodyPr>
           <a:lstStyle/>
           <a:p>
-            <a:pPr marL="0" lvl="0" indent="0" algn="l" rtl="0">
-              <a:spcBef>
-                <a:spcPts val="0"/>
-              </a:spcBef>
-              <a:spcAft>
-                <a:spcPts val="0"/>
-              </a:spcAft>
-              <a:buNone/>
-            </a:pPr>
-            <a:r>
-              <a:rPr lang="en-US" dirty="0"/>
-              <a:t>Walk it line by line. FROM pulls a minimal Python 3.12 base, WORKDIR makes /app inside the image so everything after it runs from there, then COPY requirements and RUN pip install is the installs-deps dance...and THEN we COPY the rest of the code. That ordering is doing real work, and it's the whole caching story on the next few slides. CMD is just the default command when someone runs the container.</a:t>
-            </a:r>
-            <a:endParaRPr dirty="0"/>
+            <a:r>
+              <a:t>Flag the deps-before-code order; explain why on the caching slides.</a:t>
+            </a:r>
           </a:p>
         </p:txBody>
       </p:sp>
@@ -4205,20 +3816,9 @@
           </a:bodyPr>
           <a:lstStyle/>
           <a:p>
-            <a:pPr marL="0" lvl="0" indent="0" algn="l" rtl="0">
-              <a:spcBef>
-                <a:spcPts val="0"/>
-              </a:spcBef>
-              <a:spcAft>
-                <a:spcPts val="0"/>
-              </a:spcAft>
-              <a:buNone/>
-            </a:pPr>
-            <a:r>
-              <a:rPr lang="en-US" dirty="0"/>
-              <a:t>Walk it line by line. FROM pulls a minimal Python 3.12 base, WORKDIR makes /app inside the image so everything after it runs from there, then COPY requirements and RUN pip install is the installs-deps dance...and THEN we COPY the rest of the code. That ordering is doing real work, and it's the whole caching story on the next few slides. CMD is just the default command when someone runs the container.</a:t>
-            </a:r>
-            <a:endParaRPr dirty="0"/>
+            <a:r>
+              <a:t>Flag the deps-before-code order; explain why on the caching slides.</a:t>
+            </a:r>
           </a:p>
         </p:txBody>
       </p:sp>
@@ -4363,20 +3963,9 @@
           </a:bodyPr>
           <a:lstStyle/>
           <a:p>
-            <a:pPr marL="0" lvl="0" indent="0" algn="l" rtl="0">
-              <a:spcBef>
-                <a:spcPts val="0"/>
-              </a:spcBef>
-              <a:spcAft>
-                <a:spcPts val="0"/>
-              </a:spcAft>
-              <a:buNone/>
-            </a:pPr>
-            <a:r>
-              <a:rPr lang="en-US" dirty="0"/>
-              <a:t>Walk it line by line. FROM pulls a minimal Python 3.12 base, WORKDIR makes /app inside the image so everything after it runs from there, then COPY requirements and RUN pip install is the installs-deps dance...and THEN we COPY the rest of the code. That ordering is doing real work, and it's the whole caching story on the next few slides. CMD is just the default command when someone runs the container.</a:t>
-            </a:r>
-            <a:endParaRPr dirty="0"/>
+            <a:r>
+              <a:t>Flag the deps-before-code order; explain why on the caching slides.</a:t>
+            </a:r>
           </a:p>
         </p:txBody>
       </p:sp>
@@ -4520,30 +4109,7 @@
             <a:noAutofit/>
           </a:bodyPr>
           <a:lstStyle/>
-          <a:p>
-            <a:pPr marL="0" lvl="0" indent="0" algn="l" rtl="0">
-              <a:spcBef>
-                <a:spcPts val="0"/>
-              </a:spcBef>
-              <a:spcAft>
-                <a:spcPts val="0"/>
-              </a:spcAft>
-              <a:buNone/>
-            </a:pPr>
-            <a:r>
-              <a:rPr lang="en-US" dirty="0"/>
-              <a:t>Routes first, static mount second, or the mount swallows your API paths. And html=True is the bit that makes it hand back index.html for any path that isn't a real file on disk, which is what client-side routing needs to work at all.</a:t>
-            </a:r>
-            <a:r>
-              <a:rPr lang="en-US" dirty="0" err="1"/>
-              <a:t/>
-            </a:r>
-            <a:r>
-              <a:rPr lang="en-US" dirty="0"/>
-              <a:t/>
-            </a:r>
-            <a:endParaRPr dirty="0"/>
-          </a:p>
+          <a:p/>
         </p:txBody>
       </p:sp>
       <p:sp>
@@ -4687,36 +4253,9 @@
           </a:bodyPr>
           <a:lstStyle/>
           <a:p>
-            <a:pPr marL="0" lvl="0" indent="0" algn="l" rtl="0">
-              <a:spcBef>
-                <a:spcPts val="0"/>
-              </a:spcBef>
-              <a:spcAft>
-                <a:spcPts val="0"/>
-              </a:spcAft>
-              <a:buNone/>
-            </a:pPr>
-            <a:r>
-              <a:rPr lang="en-US" dirty="0"/>
-              <a:t>Layer caching is THE reason Dockerfile order matters. A Dockerfile that copies code before installing deps reinstalls every dependency on every code change, which is fine the first time and super annoying by the twentieth build that day...and once you've felt the difference between a 2-second rebuild and a 30-second one, slow-stuff-first sticks without me having to sell it. Predict beat next slide, so don't pre-spoil it.</a:t>
-            </a:r>
-            <a:r>
-              <a:rPr lang="en-US" dirty="0" err="1"/>
-              <a:t/>
-            </a:r>
-            <a:r>
-              <a:rPr lang="en-US" dirty="0"/>
-              <a:t/>
-            </a:r>
-            <a:r>
-              <a:rPr lang="en-US" dirty="0" err="1"/>
-              <a:t/>
-            </a:r>
-            <a:r>
-              <a:rPr lang="en-US" dirty="0"/>
-              <a:t/>
-            </a:r>
-            <a:endParaRPr dirty="0"/>
+            <a:r>
+              <a:t>Don't spoil the predict question next.</a:t>
+            </a:r>
           </a:p>
         </p:txBody>
       </p:sp>
@@ -4861,28 +4400,9 @@
           </a:bodyPr>
           <a:lstStyle/>
           <a:p>
-            <a:pPr marL="0" lvl="0" indent="0" algn="l" rtl="0">
-              <a:spcBef>
-                <a:spcPts val="0"/>
-              </a:spcBef>
-              <a:spcAft>
-                <a:spcPts val="0"/>
-              </a:spcAft>
-              <a:buNone/>
-            </a:pPr>
-            <a:r>
-              <a:rPr lang="en-US" dirty="0"/>
-              <a:t>Call on someone, don't reveal. Show of hands per option. It's (c). Docker caches layers in order, so the FIRST layer whose inputs changed - here that's [5], the COPY . . that picks up app.py - gets rebuilt, and everything below it goes with it, because each layer sits on top of the one before. [1] through [4] never got touched, so pip install does NOT run again. (a) is 'make clean' thinking. (d) is the trap for anyone half-remembering the rule, right idea aimed at the wrong layers. Then the bad-vs-good ordering slide is what this behavior forces on you.</a:t>
-            </a:r>
-            <a:r>
-              <a:rPr lang="en-US" dirty="0" err="1"/>
-              <a:t/>
-            </a:r>
-            <a:r>
-              <a:rPr lang="en-US" dirty="0"/>
-              <a:t/>
-            </a:r>
-            <a:endParaRPr dirty="0"/>
+            <a:r>
+              <a:t>Hands per option. Answer (c): [5] changed, everything below it rebuilds, pip doesn't rerun.</a:t>
+            </a:r>
           </a:p>
         </p:txBody>
       </p:sp>
@@ -5027,28 +4547,9 @@
           </a:bodyPr>
           <a:lstStyle/>
           <a:p>
-            <a:pPr marL="0" lvl="0" indent="0" algn="l" rtl="0">
-              <a:spcBef>
-                <a:spcPts val="0"/>
-              </a:spcBef>
-              <a:spcAft>
-                <a:spcPts val="0"/>
-              </a:spcAft>
-              <a:buNone/>
-            </a:pPr>
-            <a:r>
-              <a:rPr lang="en-US" dirty="0"/>
-              <a:t>Call on someone, don't reveal. Show of hands per option. It's (c). Docker caches layers in order, so the FIRST layer whose inputs changed - here that's [5], the COPY . . that picks up app.py - gets rebuilt, and everything below it goes with it, because each layer sits on top of the one before. [1] through [4] never got touched, so pip install does NOT run again. (a) is 'make clean' thinking. (d) is the trap for anyone half-remembering the rule, right idea aimed at the wrong layers. Then the bad-vs-good ordering slide is what this behavior forces on you.</a:t>
-            </a:r>
-            <a:r>
-              <a:rPr lang="en-US" dirty="0" err="1"/>
-              <a:t/>
-            </a:r>
-            <a:r>
-              <a:rPr lang="en-US" dirty="0"/>
-              <a:t/>
-            </a:r>
-            <a:endParaRPr dirty="0"/>
+            <a:r>
+              <a:t>Hands per option. Answer (c): [5] changed, everything below it rebuilds, pip doesn't rerun.</a:t>
+            </a:r>
           </a:p>
         </p:txBody>
       </p:sp>
@@ -5193,44 +4694,9 @@
           </a:bodyPr>
           <a:lstStyle/>
           <a:p>
-            <a:pPr marL="0" lvl="0" indent="0" algn="l" rtl="0">
-              <a:spcBef>
-                <a:spcPts val="0"/>
-              </a:spcBef>
-              <a:spcAft>
-                <a:spcPts val="0"/>
-              </a:spcAft>
-              <a:buNone/>
-            </a:pPr>
-            <a:r>
-              <a:rPr lang="en-US" dirty="0"/>
-              <a:t>Because a changed layer rebuilds everything below it, you deliberately put the thing that rarely changes (</a:t>
-            </a:r>
-            <a:r>
-              <a:rPr lang="en-US" dirty="0" err="1"/>
-              <a:t>requirements.txt</a:t>
-            </a:r>
-            <a:r>
-              <a:rPr lang="en-US" dirty="0"/>
-              <a:t>) ABOVE the thing that always changes (your code). Side by side, the only real difference is WHERE the COPY of </a:t>
-            </a:r>
-            <a:r>
-              <a:rPr lang="en-US" dirty="0" err="1"/>
-              <a:t>requirements.txt</a:t>
-            </a:r>
-            <a:r>
-              <a:rPr lang="en-US" dirty="0"/>
-              <a:t> sits. In the bad version any code change busts the pip install cache too, because COPY . . ran before the install. In the good version the install layer stays cached until requirements.txt itself changes, which is maybe once a week, and that's where the 15x on a busy day comes from.</a:t>
-            </a:r>
-            <a:r>
-              <a:rPr lang="en-US" dirty="0" err="1"/>
-              <a:t/>
-            </a:r>
-            <a:r>
-              <a:rPr lang="en-US" dirty="0"/>
-              <a:t/>
-            </a:r>
-            <a:endParaRPr dirty="0"/>
+            <a:r>
+              <a:t>Only difference is where `COPY requirements.txt` sits. Requirements change maybe weekly.</a:t>
+            </a:r>
           </a:p>
         </p:txBody>
       </p:sp>
@@ -5375,44 +4841,9 @@
           </a:bodyPr>
           <a:lstStyle/>
           <a:p>
-            <a:pPr marL="0" lvl="0" indent="0" algn="l" rtl="0">
-              <a:spcBef>
-                <a:spcPts val="0"/>
-              </a:spcBef>
-              <a:spcAft>
-                <a:spcPts val="0"/>
-              </a:spcAft>
-              <a:buNone/>
-            </a:pPr>
-            <a:r>
-              <a:rPr lang="en-US" dirty="0"/>
-              <a:t>Because a changed layer rebuilds everything below it, you deliberately put the thing that rarely changes (</a:t>
-            </a:r>
-            <a:r>
-              <a:rPr lang="en-US" dirty="0" err="1"/>
-              <a:t>requirements.txt</a:t>
-            </a:r>
-            <a:r>
-              <a:rPr lang="en-US" dirty="0"/>
-              <a:t>) ABOVE the thing that always changes (your code). Side by side, the only real difference is WHERE the COPY of </a:t>
-            </a:r>
-            <a:r>
-              <a:rPr lang="en-US" dirty="0" err="1"/>
-              <a:t>requirements.txt</a:t>
-            </a:r>
-            <a:r>
-              <a:rPr lang="en-US" dirty="0"/>
-              <a:t> sits. In the bad version any code change busts the pip install cache too, because COPY . . ran before the install. In the good version the install layer stays cached until requirements.txt itself changes, which is maybe once a week, and that's where the 15x on a busy day comes from.</a:t>
-            </a:r>
-            <a:r>
-              <a:rPr lang="en-US" dirty="0" err="1"/>
-              <a:t/>
-            </a:r>
-            <a:r>
-              <a:rPr lang="en-US" dirty="0"/>
-              <a:t/>
-            </a:r>
-            <a:endParaRPr dirty="0"/>
+            <a:r>
+              <a:t>Only difference is where `COPY requirements.txt` sits. Requirements change maybe weekly.</a:t>
+            </a:r>
           </a:p>
         </p:txBody>
       </p:sp>
@@ -5556,30 +4987,7 @@
             <a:noAutofit/>
           </a:bodyPr>
           <a:lstStyle/>
-          <a:p>
-            <a:pPr marL="0" lvl="0" indent="0" algn="l" rtl="0">
-              <a:spcBef>
-                <a:spcPts val="0"/>
-              </a:spcBef>
-              <a:spcAft>
-                <a:spcPts val="0"/>
-              </a:spcAft>
-              <a:buNone/>
-            </a:pPr>
-            <a:r>
-              <a:rPr lang="en-US" dirty="0"/>
-              <a:t>Mechanics of actually using the thing. Spot-the-bug beat lives here, and it's the gotcha that costs people the most time by a mile.</a:t>
-            </a:r>
-            <a:r>
-              <a:rPr lang="en-US" dirty="0" err="1"/>
-              <a:t/>
-            </a:r>
-            <a:r>
-              <a:rPr lang="en-US" dirty="0"/>
-              <a:t/>
-            </a:r>
-            <a:endParaRPr dirty="0"/>
-          </a:p>
+          <a:p/>
         </p:txBody>
       </p:sp>
       <p:sp>
@@ -5723,28 +5131,9 @@
           </a:bodyPr>
           <a:lstStyle/>
           <a:p>
-            <a:pPr marL="0" lvl="0" indent="0" algn="l" rtl="0">
-              <a:spcBef>
-                <a:spcPts val="0"/>
-              </a:spcBef>
-              <a:spcAft>
-                <a:spcPts val="0"/>
-              </a:spcAft>
-              <a:buNone/>
-            </a:pPr>
-            <a:r>
-              <a:rPr lang="en-US" dirty="0"/>
-              <a:t>Walk the output. Each numbered step lines up with one of the Dockerfile instructions from earlier, which is a nice sanity check, and notice [1] through [4] showing 0.0s on a rebuild - that's the layer caching from the predict slide doing its job. The -t flag names the image so you can refer to it later, and the dot at the end is the build context, meaning the directory Docker is allowed to COPY from.</a:t>
-            </a:r>
-            <a:r>
-              <a:rPr lang="en-US" dirty="0" err="1"/>
-              <a:t/>
-            </a:r>
-            <a:r>
-              <a:rPr lang="en-US" dirty="0"/>
-              <a:t/>
-            </a:r>
-            <a:endParaRPr dirty="0"/>
+            <a:r>
+              <a:t>Steps [1]-[4] at 0.0s on rebuild: the cache from the predict slide.</a:t>
+            </a:r>
           </a:p>
         </p:txBody>
       </p:sp>
@@ -5889,28 +5278,9 @@
           </a:bodyPr>
           <a:lstStyle/>
           <a:p>
-            <a:pPr marL="0" lvl="0" indent="0" algn="l" rtl="0">
-              <a:spcBef>
-                <a:spcPts val="0"/>
-              </a:spcBef>
-              <a:spcAft>
-                <a:spcPts val="0"/>
-              </a:spcAft>
-              <a:buNone/>
-            </a:pPr>
-            <a:r>
-              <a:rPr lang="en-US" dirty="0"/>
-              <a:t>docker run makes a fresh container from the image and starts it. -p maps host:container ports, and -e injects env vars the same way they'd set them in the Railway dashboard, so the mental model carries straight over. Spot-the-bug next on what happens when you forget the -p, so don't pre-explain it here.</a:t>
-            </a:r>
-            <a:r>
-              <a:rPr lang="en-US" dirty="0" err="1"/>
-              <a:t/>
-            </a:r>
-            <a:r>
-              <a:rPr lang="en-US" dirty="0"/>
-              <a:t/>
-            </a:r>
-            <a:endParaRPr dirty="0"/>
+            <a:r>
+              <a:t>-e is the same as Railway dashboard vars. Don't pre-explain the missing -p.</a:t>
+            </a:r>
           </a:p>
         </p:txBody>
       </p:sp>
@@ -6055,28 +5425,9 @@
           </a:bodyPr>
           <a:lstStyle/>
           <a:p>
-            <a:pPr marL="0" lvl="0" indent="0" algn="l" rtl="0">
-              <a:spcBef>
-                <a:spcPts val="0"/>
-              </a:spcBef>
-              <a:spcAft>
-                <a:spcPts val="0"/>
-              </a:spcAft>
-              <a:buNone/>
-            </a:pPr>
-            <a:r>
-              <a:rPr lang="en-US" dirty="0"/>
-              <a:t>docker run makes a fresh container from the image and starts it. -p maps host:container ports, and -e injects env vars the same way they'd set them in the Railway dashboard, so the mental model carries straight over. Spot-the-bug next on what happens when you forget the -p, so don't pre-explain it here.</a:t>
-            </a:r>
-            <a:r>
-              <a:rPr lang="en-US" dirty="0" err="1"/>
-              <a:t/>
-            </a:r>
-            <a:r>
-              <a:rPr lang="en-US" dirty="0"/>
-              <a:t/>
-            </a:r>
-            <a:endParaRPr dirty="0"/>
+            <a:r>
+              <a:t>-e is the same as Railway dashboard vars. Don't pre-explain the missing -p.</a:t>
+            </a:r>
           </a:p>
         </p:txBody>
       </p:sp>
@@ -6221,28 +5572,9 @@
           </a:bodyPr>
           <a:lstStyle/>
           <a:p>
-            <a:pPr marL="0" lvl="0" indent="0" algn="l" rtl="0">
-              <a:spcBef>
-                <a:spcPts val="0"/>
-              </a:spcBef>
-              <a:spcAft>
-                <a:spcPts val="0"/>
-              </a:spcAft>
-              <a:buNone/>
-            </a:pPr>
-            <a:r>
-              <a:rPr lang="en-US" dirty="0"/>
-              <a:t>Call on someone. It's (b) - the docker run has no -p. Container ports are isolated by default, so the app really is listening on 8000, but that's the CONTAINER's 8000, walled off from the laptop, and nothing is forwarding localhost:8000 to it. Air option (a) out loud anyway, because it's the OTHER way to produce this exact symptom: bind uvicorn to 127.0.0.1 instead of 0.0.0.0 and it's unreachable from outside the container too. Here the log clearly says 0.0.0.0, so this one is the missing -p. From the browser those two look exactly the same, which is what makes it take an hour to find. Full explanation next slide.</a:t>
-            </a:r>
-            <a:r>
-              <a:rPr lang="en-US" dirty="0" err="1"/>
-              <a:t/>
-            </a:r>
-            <a:r>
-              <a:rPr lang="en-US" dirty="0"/>
-              <a:t/>
-            </a:r>
-            <a:endParaRPr dirty="0"/>
+            <a:r>
+              <a:t>Cold-call. Answer (b); log shows 0.0.0.0 so not (a). Mention (a) gives the same symptom.</a:t>
+            </a:r>
           </a:p>
         </p:txBody>
       </p:sp>
@@ -6387,36 +5719,9 @@
           </a:bodyPr>
           <a:lstStyle/>
           <a:p>
-            <a:pPr marL="0" lvl="0" indent="0" algn="l" rtl="0">
-              <a:spcBef>
-                <a:spcPts val="0"/>
-              </a:spcBef>
-              <a:spcAft>
-                <a:spcPts val="0"/>
-              </a:spcAft>
-              <a:buNone/>
-            </a:pPr>
-            <a:r>
-              <a:rPr lang="en-US" dirty="0"/>
-              <a:t>Walk every piece. .env stays local, and python-dotenv loads it at startup if it's sitting there and quietly does nothing if it isn't...which is really the nice property here, because the same code then works in dev and in prod without a branch anywhere. On Railway the vars get injected directly so there's no .env on the server at all, and .gitignore is what keeps the file from ever hitting the repo.</a:t>
-            </a:r>
-            <a:r>
-              <a:rPr lang="en-US" dirty="0" err="1"/>
-              <a:t/>
-            </a:r>
-            <a:r>
-              <a:rPr lang="en-US" dirty="0"/>
-              <a:t/>
-            </a:r>
-            <a:r>
-              <a:rPr lang="en-US" dirty="0" err="1"/>
-              <a:t/>
-            </a:r>
-            <a:r>
-              <a:rPr lang="en-US" dirty="0"/>
-              <a:t/>
-            </a:r>
-            <a:endParaRPr dirty="0"/>
+            <a:r>
+              <a:t>On Railway the vars are injected; no .env on the server.</a:t>
+            </a:r>
           </a:p>
         </p:txBody>
       </p:sp>
@@ -6560,22 +5865,7 @@
             <a:noAutofit/>
           </a:bodyPr>
           <a:lstStyle/>
-          <a:p>
-            <a:pPr marL="0" lvl="0" indent="0" algn="l" rtl="0">
-              <a:spcBef>
-                <a:spcPts val="0"/>
-              </a:spcBef>
-              <a:spcAft>
-                <a:spcPts val="0"/>
-              </a:spcAft>
-              <a:buNone/>
-            </a:pPr>
-            <a:r>
-              <a:rPr lang="en-US" dirty="0"/>
-              <a:t>Port mapping confuses people because there are two 8000s in the air and they look identical on the page. The container has its own network namespace with its own ports, and -p builds a bridge from a host port to a container port...they don't have to be the same number, and once you're running two containers at once they can't be. This is what the spot-the-bug was setting up.</a:t>
-            </a:r>
-            <a:endParaRPr dirty="0"/>
-          </a:p>
+          <a:p/>
         </p:txBody>
       </p:sp>
       <p:sp>
@@ -6718,22 +6008,7 @@
             <a:noAutofit/>
           </a:bodyPr>
           <a:lstStyle/>
-          <a:p>
-            <a:pPr marL="0" lvl="0" indent="0" algn="l" rtl="0">
-              <a:spcBef>
-                <a:spcPts val="0"/>
-              </a:spcBef>
-              <a:spcAft>
-                <a:spcPts val="0"/>
-              </a:spcAft>
-              <a:buNone/>
-            </a:pPr>
-            <a:r>
-              <a:rPr lang="en-US" dirty="0"/>
-              <a:t>Port mapping confuses people because there are two 8000s in the air and they look identical on the page. The container has its own network namespace with its own ports, and -p builds a bridge from a host port to a container port...they don't have to be the same number, and once you're running two containers at once they can't be. This is what the spot-the-bug was setting up.</a:t>
-            </a:r>
-            <a:endParaRPr dirty="0"/>
-          </a:p>
+          <a:p/>
         </p:txBody>
       </p:sp>
       <p:sp>
@@ -6877,588 +6152,9 @@
           </a:bodyPr>
           <a:lstStyle/>
           <a:p>
-            <a:pPr marL="0" lvl="0" indent="0" algn="l" rtl="0">
-              <a:spcBef>
-                <a:spcPts val="0"/>
-              </a:spcBef>
-              <a:spcAft>
-                <a:spcPts val="0"/>
-              </a:spcAft>
-              <a:buClr>
-                <a:schemeClr val="dk1"/>
-              </a:buClr>
-              <a:buFont typeface="Arial"/>
-              <a:buNone/>
-            </a:pPr>
-            <a:r>
-              <a:rPr lang="en-US" sz="1100" b="1" dirty="0">
-                <a:solidFill>
-                  <a:srgbClr val="333344"/>
-                </a:solidFill>
-                <a:latin typeface="Courier New"/>
-                <a:ea typeface="Courier New"/>
-                <a:cs typeface="Courier New"/>
-                <a:sym typeface="Courier New"/>
-              </a:rPr>
-              <a:t># ---- On the build machine (your laptop, or a CI runner) ----</a:t>
-            </a:r>
-            <a:endParaRPr sz="1000" dirty="0">
-              <a:solidFill>
-                <a:schemeClr val="dk1"/>
-              </a:solidFill>
-            </a:endParaRPr>
-          </a:p>
-          <a:p>
-            <a:pPr marL="0" lvl="0" indent="0" algn="l" rtl="0">
-              <a:spcBef>
-                <a:spcPts val="200"/>
-              </a:spcBef>
-              <a:spcAft>
-                <a:spcPts val="0"/>
-              </a:spcAft>
-              <a:buClr>
-                <a:schemeClr val="dk1"/>
-              </a:buClr>
-              <a:buFont typeface="Arial"/>
-              <a:buNone/>
-            </a:pPr>
-            <a:endParaRPr sz="1100" b="1" dirty="0">
-              <a:solidFill>
-                <a:srgbClr val="333344"/>
-              </a:solidFill>
-              <a:latin typeface="Courier New"/>
-              <a:ea typeface="Courier New"/>
-              <a:cs typeface="Courier New"/>
-              <a:sym typeface="Courier New"/>
-            </a:endParaRPr>
-          </a:p>
-          <a:p>
-            <a:pPr marL="0" lvl="0" indent="0" algn="l" rtl="0">
-              <a:spcBef>
-                <a:spcPts val="200"/>
-              </a:spcBef>
-              <a:spcAft>
-                <a:spcPts val="0"/>
-              </a:spcAft>
-              <a:buClr>
-                <a:schemeClr val="dk1"/>
-              </a:buClr>
-              <a:buFont typeface="Arial"/>
-              <a:buNone/>
-            </a:pPr>
-            <a:r>
-              <a:rPr lang="en-US" sz="1100" b="1" dirty="0">
-                <a:solidFill>
-                  <a:srgbClr val="333344"/>
-                </a:solidFill>
-                <a:latin typeface="Courier New"/>
-                <a:ea typeface="Courier New"/>
-                <a:cs typeface="Courier New"/>
-                <a:sym typeface="Courier New"/>
-              </a:rPr>
-              <a:t>$ docker build -t </a:t>
-            </a:r>
-            <a:r>
-              <a:rPr lang="en-US" sz="1100" b="1" dirty="0" err="1">
-                <a:solidFill>
-                  <a:srgbClr val="333344"/>
-                </a:solidFill>
-                <a:latin typeface="Courier New"/>
-                <a:ea typeface="Courier New"/>
-                <a:cs typeface="Courier New"/>
-                <a:sym typeface="Courier New"/>
-              </a:rPr>
-              <a:t>ghcr.io</a:t>
-            </a:r>
-            <a:r>
-              <a:rPr lang="en-US" sz="1100" b="1" dirty="0">
-                <a:solidFill>
-                  <a:srgbClr val="333344"/>
-                </a:solidFill>
-                <a:latin typeface="Courier New"/>
-                <a:ea typeface="Courier New"/>
-                <a:cs typeface="Courier New"/>
-                <a:sym typeface="Courier New"/>
-              </a:rPr>
-              <a:t>/you/</a:t>
-            </a:r>
-            <a:r>
-              <a:rPr lang="en-US" sz="1100" b="1" dirty="0" err="1">
-                <a:solidFill>
-                  <a:srgbClr val="333344"/>
-                </a:solidFill>
-                <a:latin typeface="Courier New"/>
-                <a:ea typeface="Courier New"/>
-                <a:cs typeface="Courier New"/>
-                <a:sym typeface="Courier New"/>
-              </a:rPr>
-              <a:t>chat-app:latest</a:t>
-            </a:r>
-            <a:r>
-              <a:rPr lang="en-US" sz="1100" b="1" dirty="0">
-                <a:solidFill>
-                  <a:srgbClr val="333344"/>
-                </a:solidFill>
-                <a:latin typeface="Courier New"/>
-                <a:ea typeface="Courier New"/>
-                <a:cs typeface="Courier New"/>
-                <a:sym typeface="Courier New"/>
-              </a:rPr>
-              <a:t> .</a:t>
-            </a:r>
-            <a:endParaRPr sz="1000" dirty="0">
-              <a:solidFill>
-                <a:schemeClr val="dk1"/>
-              </a:solidFill>
-            </a:endParaRPr>
-          </a:p>
-          <a:p>
-            <a:pPr marL="0" lvl="0" indent="0" algn="l" rtl="0">
-              <a:spcBef>
-                <a:spcPts val="200"/>
-              </a:spcBef>
-              <a:spcAft>
-                <a:spcPts val="0"/>
-              </a:spcAft>
-              <a:buClr>
-                <a:schemeClr val="dk1"/>
-              </a:buClr>
-              <a:buFont typeface="Arial"/>
-              <a:buNone/>
-            </a:pPr>
-            <a:r>
-              <a:rPr lang="en-US" sz="1100" b="1" dirty="0">
-                <a:solidFill>
-                  <a:srgbClr val="333344"/>
-                </a:solidFill>
-                <a:latin typeface="Courier New"/>
-                <a:ea typeface="Courier New"/>
-                <a:cs typeface="Courier New"/>
-                <a:sym typeface="Courier New"/>
-              </a:rPr>
-              <a:t>$ docker push </a:t>
-            </a:r>
-            <a:r>
-              <a:rPr lang="en-US" sz="1100" b="1" dirty="0" err="1">
-                <a:solidFill>
-                  <a:srgbClr val="333344"/>
-                </a:solidFill>
-                <a:latin typeface="Courier New"/>
-                <a:ea typeface="Courier New"/>
-                <a:cs typeface="Courier New"/>
-                <a:sym typeface="Courier New"/>
-              </a:rPr>
-              <a:t>ghcr.io</a:t>
-            </a:r>
-            <a:r>
-              <a:rPr lang="en-US" sz="1100" b="1" dirty="0">
-                <a:solidFill>
-                  <a:srgbClr val="333344"/>
-                </a:solidFill>
-                <a:latin typeface="Courier New"/>
-                <a:ea typeface="Courier New"/>
-                <a:cs typeface="Courier New"/>
-                <a:sym typeface="Courier New"/>
-              </a:rPr>
-              <a:t>/you/</a:t>
-            </a:r>
-            <a:r>
-              <a:rPr lang="en-US" sz="1100" b="1" dirty="0" err="1">
-                <a:solidFill>
-                  <a:srgbClr val="333344"/>
-                </a:solidFill>
-                <a:latin typeface="Courier New"/>
-                <a:ea typeface="Courier New"/>
-                <a:cs typeface="Courier New"/>
-                <a:sym typeface="Courier New"/>
-              </a:rPr>
-              <a:t>chat-app:latest</a:t>
-            </a:r>
-            <a:endParaRPr sz="1000" dirty="0">
-              <a:solidFill>
-                <a:schemeClr val="dk1"/>
-              </a:solidFill>
-            </a:endParaRPr>
-          </a:p>
-          <a:p>
-            <a:pPr marL="0" lvl="0" indent="0" algn="l" rtl="0">
-              <a:spcBef>
-                <a:spcPts val="200"/>
-              </a:spcBef>
-              <a:spcAft>
-                <a:spcPts val="0"/>
-              </a:spcAft>
-              <a:buClr>
-                <a:schemeClr val="dk1"/>
-              </a:buClr>
-              <a:buFont typeface="Arial"/>
-              <a:buNone/>
-            </a:pPr>
-            <a:r>
-              <a:rPr lang="en-US" sz="1100" b="1" dirty="0">
-                <a:solidFill>
-                  <a:srgbClr val="333344"/>
-                </a:solidFill>
-                <a:latin typeface="Courier New"/>
-                <a:ea typeface="Courier New"/>
-                <a:cs typeface="Courier New"/>
-                <a:sym typeface="Courier New"/>
-              </a:rPr>
-              <a:t>   ...uploaded to the registry.</a:t>
-            </a:r>
-            <a:endParaRPr sz="1000" dirty="0">
-              <a:solidFill>
-                <a:schemeClr val="dk1"/>
-              </a:solidFill>
-            </a:endParaRPr>
-          </a:p>
-          <a:p>
-            <a:pPr marL="0" lvl="0" indent="0" algn="l" rtl="0">
-              <a:spcBef>
-                <a:spcPts val="200"/>
-              </a:spcBef>
-              <a:spcAft>
-                <a:spcPts val="0"/>
-              </a:spcAft>
-              <a:buClr>
-                <a:schemeClr val="dk1"/>
-              </a:buClr>
-              <a:buFont typeface="Arial"/>
-              <a:buNone/>
-            </a:pPr>
-            <a:endParaRPr sz="1100" b="1" dirty="0">
-              <a:solidFill>
-                <a:srgbClr val="333344"/>
-              </a:solidFill>
-              <a:latin typeface="Courier New"/>
-              <a:ea typeface="Courier New"/>
-              <a:cs typeface="Courier New"/>
-              <a:sym typeface="Courier New"/>
-            </a:endParaRPr>
-          </a:p>
-          <a:p>
-            <a:pPr marL="0" lvl="0" indent="0" algn="l" rtl="0">
-              <a:spcBef>
-                <a:spcPts val="200"/>
-              </a:spcBef>
-              <a:spcAft>
-                <a:spcPts val="0"/>
-              </a:spcAft>
-              <a:buClr>
-                <a:schemeClr val="dk1"/>
-              </a:buClr>
-              <a:buFont typeface="Arial"/>
-              <a:buNone/>
-            </a:pPr>
-            <a:endParaRPr sz="1100" b="1" dirty="0">
-              <a:solidFill>
-                <a:srgbClr val="333344"/>
-              </a:solidFill>
-              <a:latin typeface="Courier New"/>
-              <a:ea typeface="Courier New"/>
-              <a:cs typeface="Courier New"/>
-              <a:sym typeface="Courier New"/>
-            </a:endParaRPr>
-          </a:p>
-          <a:p>
-            <a:pPr marL="0" lvl="0" indent="0" algn="l" rtl="0">
-              <a:spcBef>
-                <a:spcPts val="200"/>
-              </a:spcBef>
-              <a:spcAft>
-                <a:spcPts val="0"/>
-              </a:spcAft>
-              <a:buClr>
-                <a:schemeClr val="dk1"/>
-              </a:buClr>
-              <a:buFont typeface="Arial"/>
-              <a:buNone/>
-            </a:pPr>
-            <a:r>
-              <a:rPr lang="en-US" sz="1100" b="1" dirty="0">
-                <a:solidFill>
-                  <a:srgbClr val="333344"/>
-                </a:solidFill>
-                <a:latin typeface="Courier New"/>
-                <a:ea typeface="Courier New"/>
-                <a:cs typeface="Courier New"/>
-                <a:sym typeface="Courier New"/>
-              </a:rPr>
-              <a:t># ---- On the production server ----</a:t>
-            </a:r>
-            <a:endParaRPr sz="1000" dirty="0">
-              <a:solidFill>
-                <a:schemeClr val="dk1"/>
-              </a:solidFill>
-            </a:endParaRPr>
-          </a:p>
-          <a:p>
-            <a:pPr marL="0" lvl="0" indent="0" algn="l" rtl="0">
-              <a:spcBef>
-                <a:spcPts val="200"/>
-              </a:spcBef>
-              <a:spcAft>
-                <a:spcPts val="0"/>
-              </a:spcAft>
-              <a:buClr>
-                <a:schemeClr val="dk1"/>
-              </a:buClr>
-              <a:buFont typeface="Arial"/>
-              <a:buNone/>
-            </a:pPr>
-            <a:endParaRPr sz="1100" b="1" dirty="0">
-              <a:solidFill>
-                <a:srgbClr val="333344"/>
-              </a:solidFill>
-              <a:latin typeface="Courier New"/>
-              <a:ea typeface="Courier New"/>
-              <a:cs typeface="Courier New"/>
-              <a:sym typeface="Courier New"/>
-            </a:endParaRPr>
-          </a:p>
-          <a:p>
-            <a:pPr marL="0" lvl="0" indent="0" algn="l" rtl="0">
-              <a:spcBef>
-                <a:spcPts val="200"/>
-              </a:spcBef>
-              <a:spcAft>
-                <a:spcPts val="0"/>
-              </a:spcAft>
-              <a:buClr>
-                <a:schemeClr val="dk1"/>
-              </a:buClr>
-              <a:buFont typeface="Arial"/>
-              <a:buNone/>
-            </a:pPr>
-            <a:r>
-              <a:rPr lang="en-US" sz="1100" b="1" dirty="0">
-                <a:solidFill>
-                  <a:srgbClr val="333344"/>
-                </a:solidFill>
-                <a:latin typeface="Courier New"/>
-                <a:ea typeface="Courier New"/>
-                <a:cs typeface="Courier New"/>
-                <a:sym typeface="Courier New"/>
-              </a:rPr>
-              <a:t>$ docker pull </a:t>
-            </a:r>
-            <a:r>
-              <a:rPr lang="en-US" sz="1100" b="1" dirty="0" err="1">
-                <a:solidFill>
-                  <a:srgbClr val="333344"/>
-                </a:solidFill>
-                <a:latin typeface="Courier New"/>
-                <a:ea typeface="Courier New"/>
-                <a:cs typeface="Courier New"/>
-                <a:sym typeface="Courier New"/>
-              </a:rPr>
-              <a:t>ghcr.io</a:t>
-            </a:r>
-            <a:r>
-              <a:rPr lang="en-US" sz="1100" b="1" dirty="0">
-                <a:solidFill>
-                  <a:srgbClr val="333344"/>
-                </a:solidFill>
-                <a:latin typeface="Courier New"/>
-                <a:ea typeface="Courier New"/>
-                <a:cs typeface="Courier New"/>
-                <a:sym typeface="Courier New"/>
-              </a:rPr>
-              <a:t>/you/</a:t>
-            </a:r>
-            <a:r>
-              <a:rPr lang="en-US" sz="1100" b="1" dirty="0" err="1">
-                <a:solidFill>
-                  <a:srgbClr val="333344"/>
-                </a:solidFill>
-                <a:latin typeface="Courier New"/>
-                <a:ea typeface="Courier New"/>
-                <a:cs typeface="Courier New"/>
-                <a:sym typeface="Courier New"/>
-              </a:rPr>
-              <a:t>chat-app:latest</a:t>
-            </a:r>
-            <a:endParaRPr sz="1000" dirty="0">
-              <a:solidFill>
-                <a:schemeClr val="dk1"/>
-              </a:solidFill>
-            </a:endParaRPr>
-          </a:p>
-          <a:p>
-            <a:pPr marL="0" lvl="0" indent="0" algn="l" rtl="0">
-              <a:spcBef>
-                <a:spcPts val="200"/>
-              </a:spcBef>
-              <a:spcAft>
-                <a:spcPts val="0"/>
-              </a:spcAft>
-              <a:buClr>
-                <a:schemeClr val="dk1"/>
-              </a:buClr>
-              <a:buFont typeface="Arial"/>
-              <a:buNone/>
-            </a:pPr>
-            <a:r>
-              <a:rPr lang="en-US" sz="1100" b="1" dirty="0">
-                <a:solidFill>
-                  <a:srgbClr val="333344"/>
-                </a:solidFill>
-                <a:latin typeface="Courier New"/>
-                <a:ea typeface="Courier New"/>
-                <a:cs typeface="Courier New"/>
-                <a:sym typeface="Courier New"/>
-              </a:rPr>
-              <a:t>   ...downloaded from the registry.</a:t>
-            </a:r>
-            <a:endParaRPr sz="1000" dirty="0">
-              <a:solidFill>
-                <a:schemeClr val="dk1"/>
-              </a:solidFill>
-            </a:endParaRPr>
-          </a:p>
-          <a:p>
-            <a:pPr marL="0" lvl="0" indent="0" algn="l" rtl="0">
-              <a:spcBef>
-                <a:spcPts val="200"/>
-              </a:spcBef>
-              <a:spcAft>
-                <a:spcPts val="0"/>
-              </a:spcAft>
-              <a:buClr>
-                <a:schemeClr val="dk1"/>
-              </a:buClr>
-              <a:buFont typeface="Arial"/>
-              <a:buNone/>
-            </a:pPr>
-            <a:endParaRPr sz="1100" b="1" dirty="0">
-              <a:solidFill>
-                <a:srgbClr val="333344"/>
-              </a:solidFill>
-              <a:latin typeface="Courier New"/>
-              <a:ea typeface="Courier New"/>
-              <a:cs typeface="Courier New"/>
-              <a:sym typeface="Courier New"/>
-            </a:endParaRPr>
-          </a:p>
-          <a:p>
-            <a:pPr marL="0" lvl="0" indent="0" algn="l" rtl="0">
-              <a:spcBef>
-                <a:spcPts val="200"/>
-              </a:spcBef>
-              <a:spcAft>
-                <a:spcPts val="0"/>
-              </a:spcAft>
-              <a:buClr>
-                <a:schemeClr val="dk1"/>
-              </a:buClr>
-              <a:buFont typeface="Arial"/>
-              <a:buNone/>
-            </a:pPr>
-            <a:r>
-              <a:rPr lang="en-US" sz="1100" b="1" dirty="0">
-                <a:solidFill>
-                  <a:srgbClr val="333344"/>
-                </a:solidFill>
-                <a:latin typeface="Courier New"/>
-                <a:ea typeface="Courier New"/>
-                <a:cs typeface="Courier New"/>
-                <a:sym typeface="Courier New"/>
-              </a:rPr>
-              <a:t>$ docker run -p 80:8000 -e DATABASE_URL=... </a:t>
-            </a:r>
-            <a:r>
-              <a:rPr lang="en-US" sz="1100" b="1" dirty="0" err="1">
-                <a:solidFill>
-                  <a:srgbClr val="333344"/>
-                </a:solidFill>
-                <a:latin typeface="Courier New"/>
-                <a:ea typeface="Courier New"/>
-                <a:cs typeface="Courier New"/>
-                <a:sym typeface="Courier New"/>
-              </a:rPr>
-              <a:t>ghcr.io</a:t>
-            </a:r>
-            <a:r>
-              <a:rPr lang="en-US" sz="1100" b="1" dirty="0">
-                <a:solidFill>
-                  <a:srgbClr val="333344"/>
-                </a:solidFill>
-                <a:latin typeface="Courier New"/>
-                <a:ea typeface="Courier New"/>
-                <a:cs typeface="Courier New"/>
-                <a:sym typeface="Courier New"/>
-              </a:rPr>
-              <a:t>/you/</a:t>
-            </a:r>
-            <a:r>
-              <a:rPr lang="en-US" sz="1100" b="1" dirty="0" err="1">
-                <a:solidFill>
-                  <a:srgbClr val="333344"/>
-                </a:solidFill>
-                <a:latin typeface="Courier New"/>
-                <a:ea typeface="Courier New"/>
-                <a:cs typeface="Courier New"/>
-                <a:sym typeface="Courier New"/>
-              </a:rPr>
-              <a:t>chat-app:latest</a:t>
-            </a:r>
-            <a:endParaRPr sz="1000" dirty="0">
-              <a:solidFill>
-                <a:schemeClr val="dk1"/>
-              </a:solidFill>
-            </a:endParaRPr>
-          </a:p>
-          <a:p>
-            <a:pPr marL="0" lvl="0" indent="0" algn="l" rtl="0">
-              <a:spcBef>
-                <a:spcPts val="200"/>
-              </a:spcBef>
-              <a:spcAft>
-                <a:spcPts val="0"/>
-              </a:spcAft>
-              <a:buClr>
-                <a:schemeClr val="dk1"/>
-              </a:buClr>
-              <a:buFont typeface="Arial"/>
-              <a:buNone/>
-            </a:pPr>
-            <a:r>
-              <a:rPr lang="en-US" sz="1100" b="1" dirty="0">
-                <a:solidFill>
-                  <a:srgbClr val="333344"/>
-                </a:solidFill>
-                <a:latin typeface="Courier New"/>
-                <a:ea typeface="Courier New"/>
-                <a:cs typeface="Courier New"/>
-                <a:sym typeface="Courier New"/>
-              </a:rPr>
-              <a:t>   INFO:  </a:t>
-            </a:r>
-            <a:r>
-              <a:rPr lang="en-US" sz="1100" b="1" dirty="0" err="1">
-                <a:solidFill>
-                  <a:srgbClr val="333344"/>
-                </a:solidFill>
-                <a:latin typeface="Courier New"/>
-                <a:ea typeface="Courier New"/>
-                <a:cs typeface="Courier New"/>
-                <a:sym typeface="Courier New"/>
-              </a:rPr>
-              <a:t>Uvicorn</a:t>
-            </a:r>
-            <a:r>
-              <a:rPr lang="en-US" sz="1100" b="1" dirty="0">
-                <a:solidFill>
-                  <a:srgbClr val="333344"/>
-                </a:solidFill>
-                <a:latin typeface="Courier New"/>
-                <a:ea typeface="Courier New"/>
-                <a:cs typeface="Courier New"/>
-                <a:sym typeface="Courier New"/>
-              </a:rPr>
-              <a:t> running.</a:t>
-            </a:r>
-            <a:endParaRPr sz="1000" dirty="0"/>
+            <a:r>
+              <a:t>Build and push on laptop or CI runner; pull and run on prod, -p 80:8000.</a:t>
+            </a:r>
           </a:p>
         </p:txBody>
       </p:sp>
@@ -7603,20 +6299,9 @@
           </a:bodyPr>
           <a:lstStyle/>
           <a:p>
-            <a:pPr marL="0" lvl="0" indent="0" algn="l" rtl="0">
-              <a:spcBef>
-                <a:spcPts val="0"/>
-              </a:spcBef>
-              <a:spcAft>
-                <a:spcPts val="0"/>
-              </a:spcAft>
-              <a:buNone/>
-            </a:pPr>
-            <a:r>
-              <a:rPr lang="en-US" dirty="0"/>
-              <a:t>Call on someone, don't reveal. It's (c). Walk the room to it: COPY . . copies the entire build context, and if a student followed 7.2 they've got a .env sitting right there in the project root with a real database URL and a JWT secret in it. That file goes straight into an image layer, and image layers aren't private - anyone who docker pulls the image, or just pokes at it with docker history, can read it back out. (a) is the tempting wrong answer because people assume Docker is clever about this and it just isn't, COPY copies exactly what you told it to. And the bug is quiet, the image still runs fine, the secret is just along for the ride. The fix is next and it ties straight back to the env var work from 7.2.</a:t>
-            </a:r>
-            <a:endParaRPr dirty="0"/>
+            <a:r>
+              <a:t>Cold-call. Answer (c): `COPY . .` includes .env; `docker history` reads it back out.</a:t>
+            </a:r>
           </a:p>
         </p:txBody>
       </p:sp>
@@ -7761,56 +6446,9 @@
           </a:bodyPr>
           <a:lstStyle/>
           <a:p>
-            <a:pPr marL="0" lvl="0" indent="0" algn="l" rtl="0">
-              <a:spcBef>
-                <a:spcPts val="0"/>
-              </a:spcBef>
-              <a:spcAft>
-                <a:spcPts val="0"/>
-              </a:spcAft>
-              <a:buClr>
-                <a:schemeClr val="dk1"/>
-              </a:buClr>
-              <a:buFont typeface="Arial"/>
-              <a:buNone/>
-            </a:pPr>
-            <a:r>
-              <a:rPr lang="en-US" sz="2400" dirty="0">
-                <a:solidFill>
-                  <a:srgbClr val="333344"/>
-                </a:solidFill>
-                <a:latin typeface="Calibri"/>
-                <a:ea typeface="Calibri"/>
-                <a:cs typeface="Calibri"/>
-                <a:sym typeface="Calibri"/>
-              </a:rPr>
-              <a:t>The answer is </a:t>
-            </a:r>
-            <a:r>
-              <a:rPr lang="en-US" sz="2400" b="1" dirty="0">
-                <a:solidFill>
-                  <a:srgbClr val="333344"/>
-                </a:solidFill>
-                <a:latin typeface="Calibri"/>
-                <a:ea typeface="Calibri"/>
-                <a:cs typeface="Calibri"/>
-                <a:sym typeface="Calibri"/>
-              </a:rPr>
-              <a:t>(c)</a:t>
-            </a:r>
-            <a:r>
-              <a:rPr lang="en-US" sz="2400" dirty="0">
-                <a:solidFill>
-                  <a:srgbClr val="333344"/>
-                </a:solidFill>
-                <a:latin typeface="Calibri"/>
-                <a:ea typeface="Calibri"/>
-                <a:cs typeface="Calibri"/>
-                <a:sym typeface="Calibri"/>
-              </a:rPr>
-              <a:t>. `COPY . .` copies everything in the folder,</a:t>
-            </a:r>
-            <a:endParaRPr dirty="0"/>
+            <a:r>
+              <a:t>Cold-call. Answer (c): `COPY . .` includes .env; `docker history` reads it back out.</a:t>
+            </a:r>
           </a:p>
         </p:txBody>
       </p:sp>
@@ -7955,52 +6593,9 @@
           </a:bodyPr>
           <a:lstStyle/>
           <a:p>
-            <a:pPr marL="0" lvl="0" indent="0" algn="l" rtl="0">
-              <a:spcBef>
-                <a:spcPts val="0"/>
-              </a:spcBef>
-              <a:spcAft>
-                <a:spcPts val="0"/>
-              </a:spcAft>
-              <a:buNone/>
-            </a:pPr>
-            <a:r>
-              <a:rPr lang="en-US" dirty="0"/>
-              <a:t>Two halves to the fix and they should take both. Build time: a .dockerignore, which works exactly like .gitignore - a list of paths COPY . . will skip - so .env never gets into the image in the first place, and it's worth saying out loud that .git and __pycache__ belong in there too, mostly for size. Run time: the image carries zero secrets, and the actual values get handed to the container when it starts, either with -e on docker run, or --env-file, or on Railway straight from the dashboard variables they already set up back in 7.2. The reassuring part is that their app code doesn't change at all, it still reads os.environ exactly the same way, all that moved is where the values come from. Then close on the line from earlier: one image, identical everywhere, config is the thing that varies.</a:t>
-            </a:r>
-            <a:r>
-              <a:rPr lang="en-US" dirty="0" err="1"/>
-              <a:t/>
-            </a:r>
-            <a:r>
-              <a:rPr lang="en-US" dirty="0"/>
-              <a:t/>
-            </a:r>
-            <a:r>
-              <a:rPr lang="en-US" dirty="0" err="1"/>
-              <a:t/>
-            </a:r>
-            <a:r>
-              <a:rPr lang="en-US" dirty="0"/>
-              <a:t/>
-            </a:r>
-            <a:r>
-              <a:rPr lang="en-US" dirty="0" err="1"/>
-              <a:t/>
-            </a:r>
-            <a:r>
-              <a:rPr lang="en-US" dirty="0"/>
-              <a:t/>
-            </a:r>
-            <a:r>
-              <a:rPr lang="en-US" dirty="0" err="1"/>
-              <a:t/>
-            </a:r>
-            <a:r>
-              <a:rPr lang="en-US" dirty="0"/>
-              <a:t/>
-            </a:r>
-            <a:endParaRPr dirty="0"/>
+            <a:r>
+              <a:t>Take both halves. .git and __pycache__ in .dockerignore mostly for size.</a:t>
+            </a:r>
           </a:p>
         </p:txBody>
       </p:sp>
@@ -8145,52 +6740,9 @@
           </a:bodyPr>
           <a:lstStyle/>
           <a:p>
-            <a:pPr marL="0" lvl="0" indent="0" algn="l" rtl="0">
-              <a:spcBef>
-                <a:spcPts val="0"/>
-              </a:spcBef>
-              <a:spcAft>
-                <a:spcPts val="0"/>
-              </a:spcAft>
-              <a:buNone/>
-            </a:pPr>
-            <a:r>
-              <a:rPr lang="en-US" dirty="0"/>
-              <a:t>Two halves to the fix and they should take both. Build time: a .dockerignore, which works exactly like .gitignore - a list of paths COPY . . will skip - so .env never gets into the image in the first place, and it's worth saying out loud that .git and __pycache__ belong in there too, mostly for size. Run time: the image carries zero secrets, and the actual values get handed to the container when it starts, either with -e on docker run, or --env-file, or on Railway straight from the dashboard variables they already set up back in 7.2. The reassuring part is that their app code doesn't change at all, it still reads os.environ exactly the same way, all that moved is where the values come from. Then close on the line from earlier: one image, identical everywhere, config is the thing that varies.</a:t>
-            </a:r>
-            <a:r>
-              <a:rPr lang="en-US" dirty="0" err="1"/>
-              <a:t/>
-            </a:r>
-            <a:r>
-              <a:rPr lang="en-US" dirty="0"/>
-              <a:t/>
-            </a:r>
-            <a:r>
-              <a:rPr lang="en-US" dirty="0" err="1"/>
-              <a:t/>
-            </a:r>
-            <a:r>
-              <a:rPr lang="en-US" dirty="0"/>
-              <a:t/>
-            </a:r>
-            <a:r>
-              <a:rPr lang="en-US" dirty="0" err="1"/>
-              <a:t/>
-            </a:r>
-            <a:r>
-              <a:rPr lang="en-US" dirty="0"/>
-              <a:t/>
-            </a:r>
-            <a:r>
-              <a:rPr lang="en-US" dirty="0" err="1"/>
-              <a:t/>
-            </a:r>
-            <a:r>
-              <a:rPr lang="en-US" dirty="0"/>
-              <a:t/>
-            </a:r>
-            <a:endParaRPr dirty="0"/>
+            <a:r>
+              <a:t>Take both halves. .git and __pycache__ in .dockerignore mostly for size.</a:t>
+            </a:r>
           </a:p>
         </p:txBody>
       </p:sp>
@@ -8334,22 +6886,7 @@
             <a:noAutofit/>
           </a:bodyPr>
           <a:lstStyle/>
-          <a:p>
-            <a:pPr marL="0" lvl="0" indent="0" algn="l" rtl="0">
-              <a:spcBef>
-                <a:spcPts val="0"/>
-              </a:spcBef>
-              <a:spcAft>
-                <a:spcPts val="0"/>
-              </a:spcAft>
-              <a:buNone/>
-            </a:pPr>
-            <a:r>
-              <a:rPr lang="en-US" dirty="0"/>
-              <a:t>What they just built is the actual unit the rest of the stack runs on, and that's worth saying plainly.</a:t>
-            </a:r>
-            <a:endParaRPr dirty="0"/>
-          </a:p>
+          <a:p/>
         </p:txBody>
       </p:sp>
       <p:sp>
@@ -8493,20 +7030,9 @@
           </a:bodyPr>
           <a:lstStyle/>
           <a:p>
-            <a:pPr marL="0" lvl="0" indent="0" algn="l" rtl="0">
-              <a:spcBef>
-                <a:spcPts val="0"/>
-              </a:spcBef>
-              <a:spcAft>
-                <a:spcPts val="0"/>
-              </a:spcAft>
-              <a:buNone/>
-            </a:pPr>
-            <a:r>
-              <a:rPr lang="en-US" dirty="0"/>
-              <a:t>Slow down and let this land. The container they built today is the literal unit the rest of the stack is made out of. CI callback is deliberate - 8.2 is next class and the Ubuntu runner they'll be using is itself a container, so today quietly sets that up. Kubernetes gets a namedrop and nothing more, don't teach it, just plant the idea that the thing it orchestrates is the thing they now understand. Close plainly: all of these systems are built out of the one unit they just built themselves.</a:t>
-            </a:r>
-            <a:endParaRPr dirty="0"/>
+            <a:r>
+              <a:t>Kubernetes: namedrop only, don't teach it.</a:t>
+            </a:r>
           </a:p>
         </p:txBody>
       </p:sp>
@@ -8650,38 +7176,7 @@
             <a:noAutofit/>
           </a:bodyPr>
           <a:lstStyle/>
-          <a:p>
-            <a:pPr marL="0" lvl="0" indent="0" algn="l" rtl="0">
-              <a:spcBef>
-                <a:spcPts val="0"/>
-              </a:spcBef>
-              <a:spcAft>
-                <a:spcPts val="0"/>
-              </a:spcAft>
-              <a:buNone/>
-            </a:pPr>
-            <a:r>
-              <a:rPr lang="en-US" dirty="0"/>
-              <a:t>The drop-in thing is what to hammer home - they don't switch tools or redo anything, they add one file to the Railway project they already have and suddenly they control the environment. Everything from 7.2 still holds, there's just a Dockerfile sitting on top of it now.</a:t>
-            </a:r>
-            <a:r>
-              <a:rPr lang="en-US" dirty="0" err="1"/>
-              <a:t/>
-            </a:r>
-            <a:r>
-              <a:rPr lang="en-US" dirty="0"/>
-              <a:t/>
-            </a:r>
-            <a:r>
-              <a:rPr lang="en-US" dirty="0" err="1"/>
-              <a:t/>
-            </a:r>
-            <a:r>
-              <a:rPr lang="en-US" dirty="0"/>
-              <a:t/>
-            </a:r>
-            <a:endParaRPr dirty="0"/>
-          </a:p>
+          <a:p/>
         </p:txBody>
       </p:sp>
       <p:sp>
@@ -8825,36 +7320,9 @@
           </a:bodyPr>
           <a:lstStyle/>
           <a:p>
-            <a:pPr marL="0" lvl="0" indent="0" algn="l" rtl="0">
-              <a:spcBef>
-                <a:spcPts val="0"/>
-              </a:spcBef>
-              <a:spcAft>
-                <a:spcPts val="0"/>
-              </a:spcAft>
-              <a:buNone/>
-            </a:pPr>
-            <a:r>
-              <a:rPr lang="en-US" dirty="0"/>
-              <a:t>Walk every piece. .env stays local, and python-dotenv loads it at startup if it's sitting there and quietly does nothing if it isn't...which is really the nice property here, because the same code then works in dev and in prod without a branch anywhere. On Railway the vars get injected directly so there's no .env on the server at all, and .gitignore is what keeps the file from ever hitting the repo.</a:t>
-            </a:r>
-            <a:r>
-              <a:rPr lang="en-US" dirty="0" err="1"/>
-              <a:t/>
-            </a:r>
-            <a:r>
-              <a:rPr lang="en-US" dirty="0"/>
-              <a:t/>
-            </a:r>
-            <a:r>
-              <a:rPr lang="en-US" dirty="0" err="1"/>
-              <a:t/>
-            </a:r>
-            <a:r>
-              <a:rPr lang="en-US" dirty="0"/>
-              <a:t/>
-            </a:r>
-            <a:endParaRPr dirty="0"/>
+            <a:r>
+              <a:t>On Railway the vars are injected; no .env on the server.</a:t>
+            </a:r>
           </a:p>
         </p:txBody>
       </p:sp>
@@ -8999,20 +7467,9 @@
           </a:bodyPr>
           <a:lstStyle/>
           <a:p>
-            <a:pPr marL="0" lvl="0" indent="0" algn="l" rtl="0">
-              <a:spcBef>
-                <a:spcPts val="0"/>
-              </a:spcBef>
-              <a:spcAft>
-                <a:spcPts val="0"/>
-              </a:spcAft>
-              <a:buNone/>
-            </a:pPr>
-            <a:r>
-              <a:rPr lang="en-US" dirty="0"/>
-              <a:t>Honest judgment-call slide, and don't let them walk out reaching for Docker reflexively - the auto-builder is good and most small projects don't need this much control. What today was actually worth is understanding what every deploy is shipping, which is a different thing from having an escape hatch you might use someday. The four bullets are real triggers worth knowing by name, and the same-image-everywhere one matters more the bigger the project gets, because it's what makes a green CI check worth anything.</a:t>
-            </a:r>
-            <a:endParaRPr dirty="0"/>
+            <a:r>
+              <a:t>Don't send them out reaching for Docker reflexively; nixpacks is fine for most.</a:t>
+            </a:r>
           </a:p>
         </p:txBody>
       </p:sp>
@@ -9157,244 +7614,9 @@
           </a:bodyPr>
           <a:lstStyle/>
           <a:p>
-            <a:pPr marL="0" lvl="0" indent="0" algn="l" rtl="0">
-              <a:spcBef>
-                <a:spcPts val="0"/>
-              </a:spcBef>
-              <a:spcAft>
-                <a:spcPts val="0"/>
-              </a:spcAft>
-              <a:buNone/>
-            </a:pPr>
-            <a:r>
-              <a:rPr lang="en-US" dirty="0"/>
-              <a:t>FROM python:3.12-slim</a:t>
-            </a:r>
-            <a:endParaRPr dirty="0"/>
-          </a:p>
-          <a:p>
-            <a:pPr marL="0" lvl="0" indent="0" algn="l" rtl="0">
-              <a:spcBef>
-                <a:spcPts val="0"/>
-              </a:spcBef>
-              <a:spcAft>
-                <a:spcPts val="0"/>
-              </a:spcAft>
-              <a:buNone/>
-            </a:pPr>
-            <a:endParaRPr dirty="0"/>
-          </a:p>
-          <a:p>
-            <a:pPr marL="0" lvl="0" indent="0" algn="l" rtl="0">
-              <a:spcBef>
-                <a:spcPts val="0"/>
-              </a:spcBef>
-              <a:spcAft>
-                <a:spcPts val="0"/>
-              </a:spcAft>
-              <a:buNone/>
-            </a:pPr>
-            <a:r>
-              <a:rPr lang="en-US" dirty="0"/>
-              <a:t>WORKDIR /app</a:t>
-            </a:r>
-            <a:endParaRPr dirty="0"/>
-          </a:p>
-          <a:p>
-            <a:pPr marL="0" lvl="0" indent="0" algn="l" rtl="0">
-              <a:spcBef>
-                <a:spcPts val="0"/>
-              </a:spcBef>
-              <a:spcAft>
-                <a:spcPts val="0"/>
-              </a:spcAft>
-              <a:buNone/>
-            </a:pPr>
-            <a:endParaRPr dirty="0"/>
-          </a:p>
-          <a:p>
-            <a:pPr marL="0" lvl="0" indent="0" algn="l" rtl="0">
-              <a:spcBef>
-                <a:spcPts val="0"/>
-              </a:spcBef>
-              <a:spcAft>
-                <a:spcPts val="0"/>
-              </a:spcAft>
-              <a:buNone/>
-            </a:pPr>
-            <a:r>
-              <a:rPr lang="en-US" dirty="0"/>
-              <a:t># Install Python deps first (slow-changing)</a:t>
-            </a:r>
-            <a:endParaRPr dirty="0"/>
-          </a:p>
-          <a:p>
-            <a:pPr marL="0" lvl="0" indent="0" algn="l" rtl="0">
-              <a:spcBef>
-                <a:spcPts val="0"/>
-              </a:spcBef>
-              <a:spcAft>
-                <a:spcPts val="0"/>
-              </a:spcAft>
-              <a:buNone/>
-            </a:pPr>
-            <a:r>
-              <a:rPr lang="en-US" dirty="0"/>
-              <a:t>COPY </a:t>
-            </a:r>
-            <a:r>
-              <a:rPr lang="en-US" dirty="0" err="1"/>
-              <a:t>requirements.txt</a:t>
-            </a:r>
-            <a:r>
-              <a:rPr lang="en-US" dirty="0"/>
-              <a:t> .</a:t>
-            </a:r>
-            <a:endParaRPr dirty="0"/>
-          </a:p>
-          <a:p>
-            <a:pPr marL="0" lvl="0" indent="0" algn="l" rtl="0">
-              <a:spcBef>
-                <a:spcPts val="0"/>
-              </a:spcBef>
-              <a:spcAft>
-                <a:spcPts val="0"/>
-              </a:spcAft>
-              <a:buNone/>
-            </a:pPr>
-            <a:r>
-              <a:rPr lang="en-US" dirty="0"/>
-              <a:t>RUN pip install --no-cache-</a:t>
-            </a:r>
-            <a:r>
-              <a:rPr lang="en-US" dirty="0" err="1"/>
-              <a:t>dir</a:t>
-            </a:r>
-            <a:r>
-              <a:rPr lang="en-US" dirty="0"/>
-              <a:t> -r </a:t>
-            </a:r>
-            <a:r>
-              <a:rPr lang="en-US" dirty="0" err="1"/>
-              <a:t>requirements.txt</a:t>
-            </a:r>
-            <a:endParaRPr dirty="0"/>
-          </a:p>
-          <a:p>
-            <a:pPr marL="0" lvl="0" indent="0" algn="l" rtl="0">
-              <a:spcBef>
-                <a:spcPts val="0"/>
-              </a:spcBef>
-              <a:spcAft>
-                <a:spcPts val="0"/>
-              </a:spcAft>
-              <a:buNone/>
-            </a:pPr>
-            <a:endParaRPr dirty="0"/>
-          </a:p>
-          <a:p>
-            <a:pPr marL="0" lvl="0" indent="0" algn="l" rtl="0">
-              <a:spcBef>
-                <a:spcPts val="0"/>
-              </a:spcBef>
-              <a:spcAft>
-                <a:spcPts val="0"/>
-              </a:spcAft>
-              <a:buNone/>
-            </a:pPr>
-            <a:r>
-              <a:rPr lang="en-US" dirty="0"/>
-              <a:t># Now copy the rest of the code (fast-changing)</a:t>
-            </a:r>
-            <a:endParaRPr dirty="0"/>
-          </a:p>
-          <a:p>
-            <a:pPr marL="0" lvl="0" indent="0" algn="l" rtl="0">
-              <a:spcBef>
-                <a:spcPts val="0"/>
-              </a:spcBef>
-              <a:spcAft>
-                <a:spcPts val="0"/>
-              </a:spcAft>
-              <a:buNone/>
-            </a:pPr>
-            <a:r>
-              <a:rPr lang="en-US" dirty="0"/>
-              <a:t>COPY . .</a:t>
-            </a:r>
-            <a:endParaRPr dirty="0"/>
-          </a:p>
-          <a:p>
-            <a:pPr marL="0" lvl="0" indent="0" algn="l" rtl="0">
-              <a:spcBef>
-                <a:spcPts val="0"/>
-              </a:spcBef>
-              <a:spcAft>
-                <a:spcPts val="0"/>
-              </a:spcAft>
-              <a:buNone/>
-            </a:pPr>
-            <a:endParaRPr dirty="0"/>
-          </a:p>
-          <a:p>
-            <a:pPr marL="0" lvl="0" indent="0" algn="l" rtl="0">
-              <a:spcBef>
-                <a:spcPts val="0"/>
-              </a:spcBef>
-              <a:spcAft>
-                <a:spcPts val="0"/>
-              </a:spcAft>
-              <a:buNone/>
-            </a:pPr>
-            <a:r>
-              <a:rPr lang="en-US" dirty="0"/>
-              <a:t># Start the server</a:t>
-            </a:r>
-            <a:endParaRPr dirty="0"/>
-          </a:p>
-          <a:p>
-            <a:pPr marL="0" lvl="0" indent="0" algn="l" rtl="0">
-              <a:spcBef>
-                <a:spcPts val="0"/>
-              </a:spcBef>
-              <a:spcAft>
-                <a:spcPts val="0"/>
-              </a:spcAft>
-              <a:buNone/>
-            </a:pPr>
-            <a:r>
-              <a:rPr lang="en-US" dirty="0"/>
-              <a:t>CMD ["</a:t>
-            </a:r>
-            <a:r>
-              <a:rPr lang="en-US" dirty="0" err="1"/>
-              <a:t>uvicorn</a:t>
-            </a:r>
-            <a:r>
-              <a:rPr lang="en-US" dirty="0"/>
-              <a:t>", "</a:t>
-            </a:r>
-            <a:r>
-              <a:rPr lang="en-US" dirty="0" err="1"/>
-              <a:t>app:app</a:t>
-            </a:r>
-            <a:r>
-              <a:rPr lang="en-US" dirty="0"/>
-              <a:t>", "--host", "0.0.0.0", "--port", "8000"]</a:t>
-            </a:r>
-            <a:endParaRPr dirty="0"/>
-          </a:p>
-          <a:p>
-            <a:pPr marL="0" lvl="0" indent="0" algn="l" rtl="0">
-              <a:spcBef>
-                <a:spcPts val="0"/>
-              </a:spcBef>
-              <a:spcAft>
-                <a:spcPts val="0"/>
-              </a:spcAft>
-              <a:buNone/>
-            </a:pPr>
-            <a:endParaRPr dirty="0"/>
+            <a:r>
+              <a:t>Blanks: python, WORKDIR, requirements.txt, --no-cache-dir, ., 0.0.0.0.</a:t>
+            </a:r>
           </a:p>
         </p:txBody>
       </p:sp>
@@ -9539,20 +7761,9 @@
           </a:bodyPr>
           <a:lstStyle/>
           <a:p>
-            <a:pPr marL="0" lvl="0" indent="0" algn="l" rtl="0">
-              <a:spcBef>
-                <a:spcPts val="0"/>
-              </a:spcBef>
-              <a:spcAft>
-                <a:spcPts val="0"/>
-              </a:spcAft>
-              <a:buNone/>
-            </a:pPr>
-            <a:r>
-              <a:rPr lang="en-US"/>
-              <a:t>Walk each answer. --no-cache-dir is a small win - pip caches downloads in ~/.cache/pip by default and those cached files get baked into the image for no reason at all, so the flag just skips it. The 0.0.0.0 bind instead of 127.0.0.1 is CRITICAL though, and it's the same bug as the spot-the-bug slide: 127.0.0.1 binds to loopback, which from inside the container means nothing outside can reach it. 0.0.0.0 binds to all interfaces, which is what you want.</a:t>
-            </a:r>
-            <a:endParaRPr/>
+            <a:r>
+              <a:t>--no-cache-dir keeps pip's download cache out of the image. 127.0.0.1 would repeat the spot-the-bug symptom.</a:t>
+            </a:r>
           </a:p>
         </p:txBody>
       </p:sp>
@@ -9697,20 +7908,9 @@
           </a:bodyPr>
           <a:lstStyle/>
           <a:p>
-            <a:pPr marL="0" lvl="0" indent="0" algn="l" rtl="0">
-              <a:spcBef>
-                <a:spcPts val="0"/>
-              </a:spcBef>
-              <a:spcAft>
-                <a:spcPts val="0"/>
-              </a:spcAft>
-              <a:buNone/>
-            </a:pPr>
-            <a:r>
-              <a:rPr lang="en-US" dirty="0"/>
-              <a:t>Recap the three mechanical ideas, then the wider one: the container they built today is what CI runners and cloud platforms are made of. Point at 8.2, which closes a loop two ways - the tests they wrote back in 4.x finally run automatically on every push, and the machine those tests run on is a container, the exact thing this lecture was about. Worth saying out loud, because it makes 8.1 and 8.2 land as one arc instead of two lectures.</a:t>
-            </a:r>
-            <a:endParaRPr dirty="0"/>
+            <a:r>
+              <a:t>8.2: the 4.x tests run on every push, inside a container.</a:t>
+            </a:r>
           </a:p>
         </p:txBody>
       </p:sp>
@@ -9855,36 +8055,9 @@
           </a:bodyPr>
           <a:lstStyle/>
           <a:p>
-            <a:pPr marL="0" lvl="0" indent="0" algn="l" rtl="0">
-              <a:spcBef>
-                <a:spcPts val="0"/>
-              </a:spcBef>
-              <a:spcAft>
-                <a:spcPts val="0"/>
-              </a:spcAft>
-              <a:buNone/>
-            </a:pPr>
-            <a:r>
-              <a:rPr lang="en-US" dirty="0"/>
-              <a:t>Walk every piece. .env stays local, and python-dotenv loads it at startup if it's sitting there and quietly does nothing if it isn't...which is really the nice property here, because the same code then works in dev and in prod without a branch anywhere. On Railway the vars get injected directly so there's no .env on the server at all, and .gitignore is what keeps the file from ever hitting the repo.</a:t>
-            </a:r>
-            <a:r>
-              <a:rPr lang="en-US" dirty="0" err="1"/>
-              <a:t/>
-            </a:r>
-            <a:r>
-              <a:rPr lang="en-US" dirty="0"/>
-              <a:t/>
-            </a:r>
-            <a:r>
-              <a:rPr lang="en-US" dirty="0" err="1"/>
-              <a:t/>
-            </a:r>
-            <a:r>
-              <a:rPr lang="en-US" dirty="0"/>
-              <a:t/>
-            </a:r>
-            <a:endParaRPr dirty="0"/>
+            <a:r>
+              <a:t>On Railway the vars are injected; no .env on the server.</a:t>
+            </a:r>
           </a:p>
         </p:txBody>
       </p:sp>
@@ -10029,20 +8202,9 @@
           </a:bodyPr>
           <a:lstStyle/>
           <a:p>
-            <a:pPr marL="0" lvl="0" indent="0" algn="l" rtl="0">
-              <a:spcBef>
-                <a:spcPts val="0"/>
-              </a:spcBef>
-              <a:spcAft>
-                <a:spcPts val="0"/>
-              </a:spcAft>
-              <a:buNone/>
-            </a:pPr>
-            <a:r>
-              <a:rPr lang="en-US" dirty="0"/>
-              <a:t>Open by naming the elephant - their deploys already work, so why are we here. Get that said out loud before any Docker vocabulary shows up, otherwise they spend the first twenty minutes quietly wondering.</a:t>
-            </a:r>
-            <a:endParaRPr dirty="0"/>
+            <a:r>
+              <a:t>Ask first: your deploys already work, so why are we here?</a:t>
+            </a:r>
           </a:p>
         </p:txBody>
       </p:sp>
@@ -10205,28 +8367,9 @@
           </a:bodyPr>
           <a:lstStyle/>
           <a:p>
-            <a:pPr marL="0" lvl="0" indent="0" algn="l" rtl="0">
-              <a:spcBef>
-                <a:spcPts val="0"/>
-              </a:spcBef>
-              <a:spcAft>
-                <a:spcPts val="0"/>
-              </a:spcAft>
-              <a:buNone/>
-            </a:pPr>
-            <a:r>
-              <a:rPr lang="en-US" dirty="0"/>
-              <a:t>Don't rush this one. Concede the whole thing up front, that Railway works and they probably won't strictly need a Dockerfile for the final project, because if I pretend otherwise they'll know. The argument for spending 75 minutes on it is that containers are the substrate under basically everything they'll touch after this class, and an engineer who's never opened one up is treating half their tooling as a black box...which works fine right up until the day it doesn't. CI is literally next class and it runs on this, so the callback is worth making. Close on what they walk out with: by the end of today 'the cloud' is a thing they can describe out loud.</a:t>
-            </a:r>
-            <a:r>
-              <a:rPr lang="en-US" dirty="0" err="1"/>
-              <a:t/>
-            </a:r>
-            <a:r>
-              <a:rPr lang="en-US" dirty="0"/>
-              <a:t/>
-            </a:r>
-            <a:endParaRPr dirty="0"/>
+            <a:r>
+              <a:t>Don't rush. Goal for today: they can describe 'the cloud' out loud.</a:t>
+            </a:r>
           </a:p>
         </p:txBody>
       </p:sp>
@@ -10382,28 +8525,9 @@
           </a:bodyPr>
           <a:lstStyle/>
           <a:p>
-            <a:pPr marL="0" lvl="0" indent="0" algn="l" rtl="0">
-              <a:spcBef>
-                <a:spcPts val="0"/>
-              </a:spcBef>
-              <a:spcAft>
-                <a:spcPts val="0"/>
-              </a:spcAft>
-              <a:buNone/>
-            </a:pPr>
-            <a:r>
-              <a:rPr lang="en-US" dirty="0"/>
-              <a:t>Don't rush this one. Concede the whole thing up front, that Railway works and they probably won't strictly need a Dockerfile for the final project, because if I pretend otherwise they'll know. The argument for spending 75 minutes on it is that containers are the substrate under basically everything they'll touch after this class, and an engineer who's never opened one up is treating half their tooling as a black box...which works fine right up until the day it doesn't. CI is literally next class and it runs on this, so the callback is worth making. Close on what they walk out with: by the end of today 'the cloud' is a thing they can describe out loud.</a:t>
-            </a:r>
-            <a:r>
-              <a:rPr lang="en-US" dirty="0" err="1"/>
-              <a:t/>
-            </a:r>
-            <a:r>
-              <a:rPr lang="en-US" dirty="0"/>
-              <a:t/>
-            </a:r>
-            <a:endParaRPr dirty="0"/>
+            <a:r>
+              <a:t>Don't rush. Goal for today: they can describe 'the cloud' out loud.</a:t>
+            </a:r>
           </a:p>
         </p:txBody>
       </p:sp>

--- a/lectures/Lecture 8.1 - Docker.pptx
+++ b/lectures/Lecture 8.1 - Docker.pptx
@@ -6154,6 +6154,57 @@
           <a:p>
             <a:r>
               <a:t>Build and push on laptop or CI runner; pull and run on prod, -p 80:8000.</a:t>
+            </a:r>
+          </a:p>
+          <a:p/>
+          <a:p>
+            <a:r>
+              <a:t># ---- On the build machine (your laptop, or a CI runner) ----</a:t>
+            </a:r>
+          </a:p>
+          <a:p/>
+          <a:p>
+            <a:r>
+              <a:t>$ docker build -t ghcr.io/you/chat-app:latest .</a:t>
+            </a:r>
+          </a:p>
+          <a:p>
+            <a:r>
+              <a:t>$ docker push ghcr.io/you/chat-app:latest</a:t>
+            </a:r>
+          </a:p>
+          <a:p>
+            <a:r>
+              <a:t>   ...uploaded to the registry.</a:t>
+            </a:r>
+          </a:p>
+          <a:p/>
+          <a:p/>
+          <a:p>
+            <a:r>
+              <a:t># ---- On the production server ----</a:t>
+            </a:r>
+          </a:p>
+          <a:p/>
+          <a:p>
+            <a:r>
+              <a:t>$ docker pull ghcr.io/you/chat-app:latest</a:t>
+            </a:r>
+          </a:p>
+          <a:p>
+            <a:r>
+              <a:t>   ...downloaded from the registry.</a:t>
+            </a:r>
+          </a:p>
+          <a:p/>
+          <a:p>
+            <a:r>
+              <a:t>$ docker run -p 80:8000 -e DATABASE_URL=... ghcr.io/you/chat-app:latest</a:t>
+            </a:r>
+          </a:p>
+          <a:p>
+            <a:r>
+              <a:t>   INFO:  Uvicorn running.</a:t>
             </a:r>
           </a:p>
         </p:txBody>
